--- a/01-Ideacion/01-benchmarking/Benchmarking Mesa de Servicio.pptx
+++ b/01-Ideacion/01-benchmarking/Benchmarking Mesa de Servicio.pptx
@@ -5,7 +5,7 @@
     <p:sldMasterId id="2147483666" r:id="rId1"/>
   </p:sldMasterIdLst>
   <p:notesMasterIdLst>
-    <p:notesMasterId r:id="rId21"/>
+    <p:notesMasterId r:id="rId22"/>
   </p:notesMasterIdLst>
   <p:sldIdLst>
     <p:sldId id="257" r:id="rId2"/>
@@ -25,32 +25,33 @@
     <p:sldId id="304" r:id="rId16"/>
     <p:sldId id="305" r:id="rId17"/>
     <p:sldId id="306" r:id="rId18"/>
-    <p:sldId id="267" r:id="rId19"/>
-    <p:sldId id="268" r:id="rId20"/>
+    <p:sldId id="307" r:id="rId19"/>
+    <p:sldId id="267" r:id="rId20"/>
+    <p:sldId id="268" r:id="rId21"/>
   </p:sldIdLst>
   <p:sldSz cx="9144000" cy="5143500" type="screen16x9"/>
   <p:notesSz cx="6858000" cy="9144000"/>
   <p:embeddedFontLst>
     <p:embeddedFont>
       <p:font typeface="Reddit Sans" panose="020B0604020202020204" charset="0"/>
-      <p:regular r:id="rId22"/>
-      <p:bold r:id="rId23"/>
-      <p:italic r:id="rId24"/>
-      <p:boldItalic r:id="rId25"/>
+      <p:regular r:id="rId23"/>
+      <p:bold r:id="rId24"/>
+      <p:italic r:id="rId25"/>
+      <p:boldItalic r:id="rId26"/>
     </p:embeddedFont>
     <p:embeddedFont>
       <p:font typeface="Reddit Sans Medium" panose="020B0604020202020204" charset="0"/>
-      <p:regular r:id="rId26"/>
-      <p:bold r:id="rId27"/>
-      <p:italic r:id="rId28"/>
-      <p:boldItalic r:id="rId29"/>
+      <p:regular r:id="rId27"/>
+      <p:bold r:id="rId28"/>
+      <p:italic r:id="rId29"/>
+      <p:boldItalic r:id="rId30"/>
     </p:embeddedFont>
     <p:embeddedFont>
       <p:font typeface="Reddit Sans SemiBold" panose="020B0604020202020204" charset="0"/>
-      <p:regular r:id="rId30"/>
-      <p:bold r:id="rId31"/>
-      <p:italic r:id="rId32"/>
-      <p:boldItalic r:id="rId33"/>
+      <p:regular r:id="rId31"/>
+      <p:bold r:id="rId32"/>
+      <p:italic r:id="rId33"/>
+      <p:boldItalic r:id="rId34"/>
     </p:embeddedFont>
   </p:embeddedFontLst>
   <p:defaultTextStyle>
@@ -296,16 +297,7 @@
 <file path=ppt/revisionInfo.xml><?xml version="1.0" encoding="utf-8"?>
 <p1510:revInfo xmlns:a="http://schemas.openxmlformats.org/drawingml/2006/main" xmlns:r="http://schemas.openxmlformats.org/officeDocument/2006/relationships" xmlns:p1510="http://schemas.microsoft.com/office/powerpoint/2015/10/main">
   <p1510:revLst>
-    <p1510:client id="{17BDB0EA-8440-535B-18DB-FF5CDE3BDD8A}" v="7549" dt="2026-07-02T00:31:07.748"/>
-    <p1510:client id="{2161D477-6E9E-B56B-ECFA-FB26EBADB247}" v="261" dt="2026-07-02T12:42:58.279"/>
-    <p1510:client id="{49FFAE20-B3F5-172E-E134-6223BE6F4ECE}" v="204" dt="2026-07-02T21:17:42.220"/>
-    <p1510:client id="{506B96EB-3BCF-03BD-AA43-7C3BC6A79E44}" v="126" dt="2026-07-02T14:25:30.229"/>
-    <p1510:client id="{6A387F6E-53C9-68E4-8D02-B9061F1CEE3B}" v="130" dt="2026-07-02T15:35:21.437"/>
-    <p1510:client id="{6B6AB90E-C042-5FC7-F2EA-EABF5FFE3918}" v="83" dt="2026-07-02T15:42:03.432"/>
-    <p1510:client id="{CB5202B7-3888-D382-FBA9-76D2B08D21A5}" v="33" dt="2026-07-02T21:05:36.836"/>
-    <p1510:client id="{E7485014-231F-B8DA-2975-04396FBA5646}" v="389" dt="2026-07-02T13:20:18.747"/>
-    <p1510:client id="{F62C5151-2998-B7E8-0633-8132FE2BD5B5}" v="5503" dt="2026-07-02T23:22:46.996"/>
-    <p1510:client id="{FE521D2E-0E3A-00CF-6404-D6572584B17B}" v="479" dt="2026-07-02T15:24:19.027"/>
+    <p1510:client id="{C5740E76-A8B1-842A-8097-940ADCC85B94}" v="225" dt="2026-07-07T22:26:35.199"/>
   </p1510:revLst>
 </p1510:revInfo>
 </file>
@@ -995,6 +987,255 @@
   <p:cSld>
     <p:spTree>
       <p:nvGrpSpPr>
+        <p:cNvPr id="1" name="Shape 120">
+          <a:extLst>
+            <a:ext uri="{FF2B5EF4-FFF2-40B4-BE49-F238E27FC236}">
+              <a16:creationId xmlns:a16="http://schemas.microsoft.com/office/drawing/2014/main" id="{CE505433-2ACA-69A8-B0C3-A79DA987B7E2}"/>
+            </a:ext>
+          </a:extLst>
+        </p:cNvPr>
+        <p:cNvGrpSpPr/>
+        <p:nvPr/>
+      </p:nvGrpSpPr>
+      <p:grpSpPr>
+        <a:xfrm>
+          <a:off x="0" y="0"/>
+          <a:ext cx="0" cy="0"/>
+          <a:chOff x="0" y="0"/>
+          <a:chExt cx="0" cy="0"/>
+        </a:xfrm>
+      </p:grpSpPr>
+      <p:sp>
+        <p:nvSpPr>
+          <p:cNvPr id="121" name="Google Shape;121;g3657f5ba65c_1_28:notes">
+            <a:extLst>
+              <a:ext uri="{FF2B5EF4-FFF2-40B4-BE49-F238E27FC236}">
+                <a16:creationId xmlns:a16="http://schemas.microsoft.com/office/drawing/2014/main" id="{603A7570-A496-3D05-6901-598F97D07A0B}"/>
+              </a:ext>
+            </a:extLst>
+          </p:cNvPr>
+          <p:cNvSpPr>
+            <a:spLocks noGrp="1" noRot="1" noChangeAspect="1"/>
+          </p:cNvSpPr>
+          <p:nvPr>
+            <p:ph type="sldImg" idx="2"/>
+          </p:nvPr>
+        </p:nvSpPr>
+        <p:spPr>
+          <a:xfrm>
+            <a:off x="381000" y="685800"/>
+            <a:ext cx="6096000" cy="3429000"/>
+          </a:xfrm>
+          <a:custGeom>
+            <a:avLst/>
+            <a:gdLst/>
+            <a:ahLst/>
+            <a:cxnLst/>
+            <a:rect l="l" t="t" r="r" b="b"/>
+            <a:pathLst>
+              <a:path w="120000" h="120000" extrusionOk="0">
+                <a:moveTo>
+                  <a:pt x="0" y="0"/>
+                </a:moveTo>
+                <a:lnTo>
+                  <a:pt x="120000" y="0"/>
+                </a:lnTo>
+                <a:lnTo>
+                  <a:pt x="120000" y="120000"/>
+                </a:lnTo>
+                <a:lnTo>
+                  <a:pt x="0" y="120000"/>
+                </a:lnTo>
+                <a:close/>
+              </a:path>
+            </a:pathLst>
+          </a:custGeom>
+        </p:spPr>
+      </p:sp>
+      <p:sp>
+        <p:nvSpPr>
+          <p:cNvPr id="122" name="Google Shape;122;g3657f5ba65c_1_28:notes">
+            <a:extLst>
+              <a:ext uri="{FF2B5EF4-FFF2-40B4-BE49-F238E27FC236}">
+                <a16:creationId xmlns:a16="http://schemas.microsoft.com/office/drawing/2014/main" id="{71F902F3-8C74-1208-3B51-B4F19066F03C}"/>
+              </a:ext>
+            </a:extLst>
+          </p:cNvPr>
+          <p:cNvSpPr txBox="1">
+            <a:spLocks noGrp="1"/>
+          </p:cNvSpPr>
+          <p:nvPr>
+            <p:ph type="body" idx="1"/>
+          </p:nvPr>
+        </p:nvSpPr>
+        <p:spPr>
+          <a:xfrm>
+            <a:off x="685800" y="4343400"/>
+            <a:ext cx="5486400" cy="4114800"/>
+          </a:xfrm>
+          <a:prstGeom prst="rect">
+            <a:avLst/>
+          </a:prstGeom>
+        </p:spPr>
+        <p:txBody>
+          <a:bodyPr spcFirstLastPara="1" wrap="square" lIns="91425" tIns="91425" rIns="91425" bIns="91425" anchor="t" anchorCtr="0">
+            <a:noAutofit/>
+          </a:bodyPr>
+          <a:lstStyle/>
+          <a:p>
+            <a:pPr marL="0" lvl="0" indent="0" algn="l" rtl="0">
+              <a:spcBef>
+                <a:spcPts val="0"/>
+              </a:spcBef>
+              <a:spcAft>
+                <a:spcPts val="0"/>
+              </a:spcAft>
+              <a:buNone/>
+            </a:pPr>
+            <a:endParaRPr/>
+          </a:p>
+        </p:txBody>
+      </p:sp>
+    </p:spTree>
+    <p:extLst>
+      <p:ext uri="{BB962C8B-B14F-4D97-AF65-F5344CB8AC3E}">
+        <p14:creationId xmlns:p14="http://schemas.microsoft.com/office/powerpoint/2010/main" val="3636607446"/>
+      </p:ext>
+    </p:extLst>
+  </p:cSld>
+  <p:clrMapOvr>
+    <a:masterClrMapping/>
+  </p:clrMapOvr>
+</p:notes>
+</file>
+
+<file path=ppt/notesSlides/notesSlide11.xml><?xml version="1.0" encoding="utf-8"?>
+<p:notes xmlns:a="http://schemas.openxmlformats.org/drawingml/2006/main" xmlns:r="http://schemas.openxmlformats.org/officeDocument/2006/relationships" xmlns:p="http://schemas.openxmlformats.org/presentationml/2006/main" showMasterSp="0" showMasterPhAnim="0">
+  <p:cSld>
+    <p:spTree>
+      <p:nvGrpSpPr>
+        <p:cNvPr id="1" name="Shape 180"/>
+        <p:cNvGrpSpPr/>
+        <p:nvPr/>
+      </p:nvGrpSpPr>
+      <p:grpSpPr>
+        <a:xfrm>
+          <a:off x="0" y="0"/>
+          <a:ext cx="0" cy="0"/>
+          <a:chOff x="0" y="0"/>
+          <a:chExt cx="0" cy="0"/>
+        </a:xfrm>
+      </p:grpSpPr>
+      <p:sp>
+        <p:nvSpPr>
+          <p:cNvPr id="181" name="Google Shape;181;g37e80574407_0_117:notes"/>
+          <p:cNvSpPr>
+            <a:spLocks noGrp="1" noRot="1" noChangeAspect="1"/>
+          </p:cNvSpPr>
+          <p:nvPr>
+            <p:ph type="sldImg" idx="2"/>
+          </p:nvPr>
+        </p:nvSpPr>
+        <p:spPr>
+          <a:xfrm>
+            <a:off x="381000" y="685800"/>
+            <a:ext cx="6096000" cy="3429000"/>
+          </a:xfrm>
+          <a:custGeom>
+            <a:avLst/>
+            <a:gdLst/>
+            <a:ahLst/>
+            <a:cxnLst/>
+            <a:rect l="l" t="t" r="r" b="b"/>
+            <a:pathLst>
+              <a:path w="120000" h="120000" extrusionOk="0">
+                <a:moveTo>
+                  <a:pt x="0" y="0"/>
+                </a:moveTo>
+                <a:lnTo>
+                  <a:pt x="120000" y="0"/>
+                </a:lnTo>
+                <a:lnTo>
+                  <a:pt x="120000" y="120000"/>
+                </a:lnTo>
+                <a:lnTo>
+                  <a:pt x="0" y="120000"/>
+                </a:lnTo>
+                <a:close/>
+              </a:path>
+            </a:pathLst>
+          </a:custGeom>
+          <a:noFill/>
+          <a:ln w="9525" cap="flat" cmpd="sng">
+            <a:solidFill>
+              <a:srgbClr val="000000"/>
+            </a:solidFill>
+            <a:prstDash val="solid"/>
+            <a:round/>
+            <a:headEnd type="none" w="sm" len="sm"/>
+            <a:tailEnd type="none" w="sm" len="sm"/>
+          </a:ln>
+        </p:spPr>
+      </p:sp>
+      <p:sp>
+        <p:nvSpPr>
+          <p:cNvPr id="182" name="Google Shape;182;g37e80574407_0_117:notes"/>
+          <p:cNvSpPr txBox="1">
+            <a:spLocks noGrp="1"/>
+          </p:cNvSpPr>
+          <p:nvPr>
+            <p:ph type="body" idx="1"/>
+          </p:nvPr>
+        </p:nvSpPr>
+        <p:spPr>
+          <a:xfrm>
+            <a:off x="685800" y="4343400"/>
+            <a:ext cx="5486400" cy="4114800"/>
+          </a:xfrm>
+          <a:prstGeom prst="rect">
+            <a:avLst/>
+          </a:prstGeom>
+          <a:noFill/>
+          <a:ln>
+            <a:noFill/>
+          </a:ln>
+        </p:spPr>
+        <p:txBody>
+          <a:bodyPr spcFirstLastPara="1" wrap="square" lIns="91425" tIns="91425" rIns="91425" bIns="91425" anchor="t" anchorCtr="0">
+            <a:noAutofit/>
+          </a:bodyPr>
+          <a:lstStyle/>
+          <a:p>
+            <a:pPr marL="0" lvl="0" indent="0" algn="l" rtl="0">
+              <a:lnSpc>
+                <a:spcPct val="100000"/>
+              </a:lnSpc>
+              <a:spcBef>
+                <a:spcPts val="0"/>
+              </a:spcBef>
+              <a:spcAft>
+                <a:spcPts val="0"/>
+              </a:spcAft>
+              <a:buSzPts val="1100"/>
+              <a:buNone/>
+            </a:pPr>
+            <a:endParaRPr/>
+          </a:p>
+        </p:txBody>
+      </p:sp>
+    </p:spTree>
+  </p:cSld>
+  <p:clrMapOvr>
+    <a:masterClrMapping/>
+  </p:clrMapOvr>
+</p:notes>
+</file>
+
+<file path=ppt/notesSlides/notesSlide12.xml><?xml version="1.0" encoding="utf-8"?>
+<p:notes xmlns:a="http://schemas.openxmlformats.org/drawingml/2006/main" xmlns:r="http://schemas.openxmlformats.org/officeDocument/2006/relationships" xmlns:p="http://schemas.openxmlformats.org/presentationml/2006/main" showMasterSp="0" showMasterPhAnim="0">
+  <p:cSld>
+    <p:spTree>
+      <p:nvGrpSpPr>
         <p:cNvPr id="1" name="Shape 184"/>
         <p:cNvGrpSpPr/>
         <p:nvPr/>
@@ -2002,17 +2243,11 @@
 </file>
 
 <file path=ppt/notesSlides/notesSlide8.xml><?xml version="1.0" encoding="utf-8"?>
-<p:notes xmlns:a="http://schemas.openxmlformats.org/drawingml/2006/main" xmlns:r="http://schemas.openxmlformats.org/officeDocument/2006/relationships" xmlns:p="http://schemas.openxmlformats.org/presentationml/2006/main" showMasterSp="0" showMasterPhAnim="0">
+<p:notes xmlns:a="http://schemas.openxmlformats.org/drawingml/2006/main" xmlns:r="http://schemas.openxmlformats.org/officeDocument/2006/relationships" xmlns:p="http://schemas.openxmlformats.org/presentationml/2006/main">
   <p:cSld>
     <p:spTree>
       <p:nvGrpSpPr>
-        <p:cNvPr id="1" name="Shape 120">
-          <a:extLst>
-            <a:ext uri="{FF2B5EF4-FFF2-40B4-BE49-F238E27FC236}">
-              <a16:creationId xmlns:a16="http://schemas.microsoft.com/office/drawing/2014/main" id="{CE505433-2ACA-69A8-B0C3-A79DA987B7E2}"/>
-            </a:ext>
-          </a:extLst>
-        </p:cNvPr>
+        <p:cNvPr id="1" name=""/>
         <p:cNvGrpSpPr/>
         <p:nvPr/>
       </p:nvGrpSpPr>
@@ -2026,99 +2261,54 @@
       </p:grpSpPr>
       <p:sp>
         <p:nvSpPr>
-          <p:cNvPr id="121" name="Google Shape;121;g3657f5ba65c_1_28:notes">
-            <a:extLst>
-              <a:ext uri="{FF2B5EF4-FFF2-40B4-BE49-F238E27FC236}">
-                <a16:creationId xmlns:a16="http://schemas.microsoft.com/office/drawing/2014/main" id="{603A7570-A496-3D05-6901-598F97D07A0B}"/>
-              </a:ext>
-            </a:extLst>
-          </p:cNvPr>
+          <p:cNvPr id="2" name="Marcador de imagen de diapositiva 1"/>
           <p:cNvSpPr>
             <a:spLocks noGrp="1" noRot="1" noChangeAspect="1"/>
           </p:cNvSpPr>
           <p:nvPr>
-            <p:ph type="sldImg" idx="2"/>
+            <p:ph type="sldImg"/>
           </p:nvPr>
         </p:nvSpPr>
-        <p:spPr>
-          <a:xfrm>
-            <a:off x="381000" y="685800"/>
-            <a:ext cx="6096000" cy="3429000"/>
-          </a:xfrm>
-          <a:custGeom>
-            <a:avLst/>
-            <a:gdLst/>
-            <a:ahLst/>
-            <a:cxnLst/>
-            <a:rect l="l" t="t" r="r" b="b"/>
-            <a:pathLst>
-              <a:path w="120000" h="120000" extrusionOk="0">
-                <a:moveTo>
-                  <a:pt x="0" y="0"/>
-                </a:moveTo>
-                <a:lnTo>
-                  <a:pt x="120000" y="0"/>
-                </a:lnTo>
-                <a:lnTo>
-                  <a:pt x="120000" y="120000"/>
-                </a:lnTo>
-                <a:lnTo>
-                  <a:pt x="0" y="120000"/>
-                </a:lnTo>
-                <a:close/>
-              </a:path>
-            </a:pathLst>
-          </a:custGeom>
-        </p:spPr>
-      </p:sp>
-      <p:sp>
-        <p:nvSpPr>
-          <p:cNvPr id="122" name="Google Shape;122;g3657f5ba65c_1_28:notes">
-            <a:extLst>
-              <a:ext uri="{FF2B5EF4-FFF2-40B4-BE49-F238E27FC236}">
-                <a16:creationId xmlns:a16="http://schemas.microsoft.com/office/drawing/2014/main" id="{71F902F3-8C74-1208-3B51-B4F19066F03C}"/>
-              </a:ext>
-            </a:extLst>
-          </p:cNvPr>
-          <p:cNvSpPr txBox="1">
+        <p:spPr/>
+      </p:sp>
+      <p:sp>
+        <p:nvSpPr>
+          <p:cNvPr id="3" name="Marcador de notas 2"/>
+          <p:cNvSpPr>
             <a:spLocks noGrp="1"/>
           </p:cNvSpPr>
           <p:nvPr>
             <p:ph type="body" idx="1"/>
           </p:nvPr>
         </p:nvSpPr>
-        <p:spPr>
-          <a:xfrm>
-            <a:off x="685800" y="4343400"/>
-            <a:ext cx="5486400" cy="4114800"/>
-          </a:xfrm>
-          <a:prstGeom prst="rect">
-            <a:avLst/>
-          </a:prstGeom>
-        </p:spPr>
+        <p:spPr/>
         <p:txBody>
-          <a:bodyPr spcFirstLastPara="1" wrap="square" lIns="91425" tIns="91425" rIns="91425" bIns="91425" anchor="t" anchorCtr="0">
-            <a:noAutofit/>
-          </a:bodyPr>
+          <a:bodyPr/>
           <a:lstStyle/>
           <a:p>
-            <a:pPr marL="0" lvl="0" indent="0" algn="l" rtl="0">
-              <a:spcBef>
-                <a:spcPts val="0"/>
-              </a:spcBef>
-              <a:spcAft>
-                <a:spcPts val="0"/>
-              </a:spcAft>
+            <a:pPr>
               <a:buNone/>
             </a:pPr>
-            <a:endParaRPr/>
+            <a:r>
+              <a:rPr lang="en-US" dirty="0">
+                <a:solidFill>
+                  <a:srgbClr val="191919"/>
+                </a:solidFill>
+                <a:highlight>
+                  <a:srgbClr val="F8F4F1"/>
+                </a:highlight>
+                <a:hlinkClick r:id="rId3"/>
+              </a:rPr>
+              <a:t>El swarming en una mesa de servicios se refiere a un modelo de soporte que utiliza la colaboración y la inteligencia colectiva para resolver problemas de manera más eficiente</a:t>
+            </a:r>
+            <a:endParaRPr lang="es-ES"/>
           </a:p>
         </p:txBody>
       </p:sp>
     </p:spTree>
     <p:extLst>
       <p:ext uri="{BB962C8B-B14F-4D97-AF65-F5344CB8AC3E}">
-        <p14:creationId xmlns:p14="http://schemas.microsoft.com/office/powerpoint/2010/main" val="3636607446"/>
+        <p14:creationId xmlns:p14="http://schemas.microsoft.com/office/powerpoint/2010/main" val="4229955961"/>
       </p:ext>
     </p:extLst>
   </p:cSld>
@@ -2129,11 +2319,11 @@
 </file>
 
 <file path=ppt/notesSlides/notesSlide9.xml><?xml version="1.0" encoding="utf-8"?>
-<p:notes xmlns:a="http://schemas.openxmlformats.org/drawingml/2006/main" xmlns:r="http://schemas.openxmlformats.org/officeDocument/2006/relationships" xmlns:p="http://schemas.openxmlformats.org/presentationml/2006/main" showMasterSp="0" showMasterPhAnim="0">
+<p:notes xmlns:a="http://schemas.openxmlformats.org/drawingml/2006/main" xmlns:r="http://schemas.openxmlformats.org/officeDocument/2006/relationships" xmlns:p="http://schemas.openxmlformats.org/presentationml/2006/main">
   <p:cSld>
     <p:spTree>
       <p:nvGrpSpPr>
-        <p:cNvPr id="1" name="Shape 180"/>
+        <p:cNvPr id="1" name=""/>
         <p:cNvGrpSpPr/>
         <p:nvPr/>
       </p:nvGrpSpPr>
@@ -2147,102 +2337,56 @@
       </p:grpSpPr>
       <p:sp>
         <p:nvSpPr>
-          <p:cNvPr id="181" name="Google Shape;181;g37e80574407_0_117:notes"/>
+          <p:cNvPr id="2" name="Marcador de imagen de diapositiva 1"/>
           <p:cNvSpPr>
             <a:spLocks noGrp="1" noRot="1" noChangeAspect="1"/>
           </p:cNvSpPr>
           <p:nvPr>
-            <p:ph type="sldImg" idx="2"/>
+            <p:ph type="sldImg"/>
           </p:nvPr>
         </p:nvSpPr>
-        <p:spPr>
-          <a:xfrm>
-            <a:off x="381000" y="685800"/>
-            <a:ext cx="6096000" cy="3429000"/>
-          </a:xfrm>
-          <a:custGeom>
-            <a:avLst/>
-            <a:gdLst/>
-            <a:ahLst/>
-            <a:cxnLst/>
-            <a:rect l="l" t="t" r="r" b="b"/>
-            <a:pathLst>
-              <a:path w="120000" h="120000" extrusionOk="0">
-                <a:moveTo>
-                  <a:pt x="0" y="0"/>
-                </a:moveTo>
-                <a:lnTo>
-                  <a:pt x="120000" y="0"/>
-                </a:lnTo>
-                <a:lnTo>
-                  <a:pt x="120000" y="120000"/>
-                </a:lnTo>
-                <a:lnTo>
-                  <a:pt x="0" y="120000"/>
-                </a:lnTo>
-                <a:close/>
-              </a:path>
-            </a:pathLst>
-          </a:custGeom>
-          <a:noFill/>
-          <a:ln w="9525" cap="flat" cmpd="sng">
-            <a:solidFill>
-              <a:srgbClr val="000000"/>
-            </a:solidFill>
-            <a:prstDash val="solid"/>
-            <a:round/>
-            <a:headEnd type="none" w="sm" len="sm"/>
-            <a:tailEnd type="none" w="sm" len="sm"/>
-          </a:ln>
-        </p:spPr>
-      </p:sp>
-      <p:sp>
-        <p:nvSpPr>
-          <p:cNvPr id="182" name="Google Shape;182;g37e80574407_0_117:notes"/>
-          <p:cNvSpPr txBox="1">
+        <p:spPr/>
+      </p:sp>
+      <p:sp>
+        <p:nvSpPr>
+          <p:cNvPr id="3" name="Marcador de notas 2"/>
+          <p:cNvSpPr>
             <a:spLocks noGrp="1"/>
           </p:cNvSpPr>
           <p:nvPr>
             <p:ph type="body" idx="1"/>
           </p:nvPr>
         </p:nvSpPr>
-        <p:spPr>
-          <a:xfrm>
-            <a:off x="685800" y="4343400"/>
-            <a:ext cx="5486400" cy="4114800"/>
-          </a:xfrm>
-          <a:prstGeom prst="rect">
-            <a:avLst/>
-          </a:prstGeom>
-          <a:noFill/>
-          <a:ln>
-            <a:noFill/>
-          </a:ln>
-        </p:spPr>
+        <p:spPr/>
         <p:txBody>
-          <a:bodyPr spcFirstLastPara="1" wrap="square" lIns="91425" tIns="91425" rIns="91425" bIns="91425" anchor="t" anchorCtr="0">
-            <a:noAutofit/>
-          </a:bodyPr>
+          <a:bodyPr/>
           <a:lstStyle/>
           <a:p>
-            <a:pPr marL="0" lvl="0" indent="0" algn="l" rtl="0">
-              <a:lnSpc>
-                <a:spcPct val="100000"/>
-              </a:lnSpc>
-              <a:spcBef>
-                <a:spcPts val="0"/>
-              </a:spcBef>
-              <a:spcAft>
-                <a:spcPts val="0"/>
-              </a:spcAft>
-              <a:buSzPts val="1100"/>
+            <a:pPr>
               <a:buNone/>
             </a:pPr>
-            <a:endParaRPr/>
+            <a:r>
+              <a:rPr lang="en-US" dirty="0">
+                <a:solidFill>
+                  <a:srgbClr val="191919"/>
+                </a:solidFill>
+                <a:highlight>
+                  <a:srgbClr val="F8F4F1"/>
+                </a:highlight>
+                <a:hlinkClick r:id="rId3"/>
+              </a:rPr>
+              <a:t>Shift-left para la Mesa de servicios de TI es el movimiento del soporte de TI más cerca de la primera línea operativa y el usuario/cliente final.</a:t>
+            </a:r>
+            <a:endParaRPr lang="es-ES"/>
           </a:p>
         </p:txBody>
       </p:sp>
     </p:spTree>
+    <p:extLst>
+      <p:ext uri="{BB962C8B-B14F-4D97-AF65-F5344CB8AC3E}">
+        <p14:creationId xmlns:p14="http://schemas.microsoft.com/office/powerpoint/2010/main" val="557411834"/>
+      </p:ext>
+    </p:extLst>
   </p:cSld>
   <p:clrMapOvr>
     <a:masterClrMapping/>
@@ -12485,26 +12629,38 @@
           <a:ln/>
         </p:spPr>
         <p:txBody>
-          <a:bodyPr wrap="square" rtlCol="0" anchor="ctr"/>
+          <a:bodyPr wrap="square" lIns="91440" tIns="45720" rIns="91440" bIns="45720" rtlCol="0" anchor="ctr"/>
           <a:lstStyle/>
           <a:p>
-            <a:pPr marL="0" indent="0">
-              <a:buNone/>
-            </a:pPr>
             <a:r>
               <a:rPr lang="en-US" sz="1200" b="1" dirty="0">
                 <a:solidFill>
                   <a:srgbClr val="0D1B5E"/>
                 </a:solidFill>
-                <a:latin typeface="Reddit Sans" panose="020B0604020202020204" charset="0"/>
-                <a:ea typeface="Reddit Sans" panose="020B0604020202020204" charset="0"/>
-                <a:cs typeface="Calibri" pitchFamily="34" charset="-120"/>
-              </a:rPr>
-              <a:t>La Brecha: Ninguno tiene un framework de assessment como oferta comercial</a:t>
-            </a:r>
-            <a:endParaRPr lang="en-US" sz="1200" dirty="0">
-              <a:latin typeface="Reddit Sans" panose="020B0604020202020204" charset="0"/>
-              <a:ea typeface="Reddit Sans" panose="020B0604020202020204" charset="0"/>
+                <a:latin typeface="Reddit Sans"/>
+                <a:ea typeface="Reddit Sans"/>
+                <a:cs typeface="Calibri"/>
+              </a:rPr>
+              <a:t>La </a:t>
+            </a:r>
+            <a:r>
+              <a:rPr lang="en-US" sz="1200" b="1">
+                <a:solidFill>
+                  <a:srgbClr val="0D1B5E"/>
+                </a:solidFill>
+                <a:latin typeface="Reddit Sans"/>
+                <a:ea typeface="Reddit Sans"/>
+                <a:cs typeface="Calibri"/>
+              </a:rPr>
+              <a:t>Brecha: </a:t>
+            </a:r>
+            <a:endParaRPr lang="en-US" sz="1200" b="1" dirty="0">
+              <a:solidFill>
+                <a:srgbClr val="0D1B5E"/>
+              </a:solidFill>
+              <a:latin typeface="Reddit Sans"/>
+              <a:ea typeface="Reddit Sans"/>
+              <a:cs typeface="Calibri"/>
             </a:endParaRPr>
           </a:p>
         </p:txBody>
@@ -12533,7 +12689,7 @@
           <a:ln/>
         </p:spPr>
         <p:txBody>
-          <a:bodyPr wrap="square" rtlCol="0" anchor="ctr"/>
+          <a:bodyPr wrap="square" lIns="91440" tIns="45720" rIns="91440" bIns="45720" rtlCol="0" anchor="ctr"/>
           <a:lstStyle/>
           <a:p>
             <a:pPr marL="342900" indent="-342900">
@@ -12543,68 +12699,13 @@
               <a:buSzPct val="100000"/>
               <a:buChar char="▪"/>
             </a:pPr>
-            <a:r>
-              <a:rPr lang="en-US" sz="1050" dirty="0">
-                <a:solidFill>
-                  <a:srgbClr val="1A1A2E"/>
-                </a:solidFill>
-                <a:latin typeface="Reddit Sans" panose="020B0604020202020204" charset="0"/>
-                <a:ea typeface="Reddit Sans" panose="020B0604020202020204" charset="0"/>
-                <a:cs typeface="Calibri" pitchFamily="34" charset="-120"/>
-              </a:rPr>
-              <a:t>Los grandes venden "AI-first" pero no diagnostican al cliente donde esta hoy</a:t>
-            </a:r>
             <a:endParaRPr lang="en-US" sz="1050" dirty="0">
+              <a:solidFill>
+                <a:srgbClr val="1A1A2E"/>
+              </a:solidFill>
               <a:latin typeface="Reddit Sans" panose="020B0604020202020204" charset="0"/>
               <a:ea typeface="Reddit Sans" panose="020B0604020202020204" charset="0"/>
-            </a:endParaRPr>
-          </a:p>
-          <a:p>
-            <a:pPr marL="342900" indent="-342900">
-              <a:spcAft>
-                <a:spcPts val="300"/>
-              </a:spcAft>
-              <a:buSzPct val="100000"/>
-              <a:buChar char="▪"/>
-            </a:pPr>
-            <a:r>
-              <a:rPr lang="en-US" sz="1050" dirty="0">
-                <a:solidFill>
-                  <a:srgbClr val="1A1A2E"/>
-                </a:solidFill>
-                <a:latin typeface="Reddit Sans" panose="020B0604020202020204" charset="0"/>
-                <a:ea typeface="Reddit Sans" panose="020B0604020202020204" charset="0"/>
-                <a:cs typeface="Calibri" pitchFamily="34" charset="-120"/>
-              </a:rPr>
-              <a:t>Nadie publica un modelo de madurez N0-N5 como propuesta comercial</a:t>
-            </a:r>
-            <a:endParaRPr lang="en-US" sz="1050" dirty="0">
-              <a:latin typeface="Reddit Sans" panose="020B0604020202020204" charset="0"/>
-              <a:ea typeface="Reddit Sans" panose="020B0604020202020204" charset="0"/>
-            </a:endParaRPr>
-          </a:p>
-          <a:p>
-            <a:pPr marL="342900" indent="-342900">
-              <a:spcAft>
-                <a:spcPts val="300"/>
-              </a:spcAft>
-              <a:buSzPct val="100000"/>
-              <a:buChar char="▪"/>
-            </a:pPr>
-            <a:r>
-              <a:rPr lang="en-US" sz="1050" dirty="0">
-                <a:solidFill>
-                  <a:srgbClr val="1A1A2E"/>
-                </a:solidFill>
-                <a:latin typeface="Reddit Sans" panose="020B0604020202020204" charset="0"/>
-                <a:ea typeface="Reddit Sans" panose="020B0604020202020204" charset="0"/>
-                <a:cs typeface="Calibri" pitchFamily="34" charset="-120"/>
-              </a:rPr>
-              <a:t>La caracterizacion AS-IS no existe como producto en el portafolio de los 12 grandes</a:t>
-            </a:r>
-            <a:endParaRPr lang="en-US" sz="1050" dirty="0">
-              <a:latin typeface="Reddit Sans" panose="020B0604020202020204" charset="0"/>
-              <a:ea typeface="Reddit Sans" panose="020B0604020202020204" charset="0"/>
+              <a:cs typeface="Calibri"/>
             </a:endParaRPr>
           </a:p>
         </p:txBody>
@@ -13779,24 +13880,149 @@
           <a:ln/>
         </p:spPr>
         <p:txBody>
-          <a:bodyPr wrap="square" rtlCol="0" anchor="ctr"/>
+          <a:bodyPr wrap="square" lIns="91440" tIns="45720" rIns="91440" bIns="45720" rtlCol="0" anchor="ctr"/>
           <a:lstStyle/>
           <a:p>
-            <a:pPr marL="0" indent="0">
-              <a:buNone/>
-            </a:pPr>
             <a:r>
               <a:rPr lang="en-US" sz="1150" b="1" dirty="0">
                 <a:solidFill>
                   <a:srgbClr val="0D1B5E"/>
                 </a:solidFill>
-                <a:latin typeface="Calibri" pitchFamily="34" charset="0"/>
-                <a:ea typeface="Calibri" pitchFamily="34" charset="-122"/>
-                <a:cs typeface="Calibri" pitchFamily="34" charset="-120"/>
-              </a:rPr>
-              <a:t>KCS como prerrequisito</a:t>
-            </a:r>
-            <a:endParaRPr lang="en-US" sz="1150" dirty="0"/>
+                <a:latin typeface="Calibri"/>
+                <a:ea typeface="Calibri"/>
+                <a:cs typeface="Calibri"/>
+              </a:rPr>
+              <a:t>KCS (Servicio </a:t>
+            </a:r>
+            <a:r>
+              <a:rPr lang="en-US" sz="1150" b="1" dirty="0" err="1">
+                <a:solidFill>
+                  <a:srgbClr val="0D1B5E"/>
+                </a:solidFill>
+                <a:latin typeface="Calibri"/>
+                <a:ea typeface="Calibri"/>
+                <a:cs typeface="Calibri"/>
+              </a:rPr>
+              <a:t>centrado</a:t>
+            </a:r>
+            <a:r>
+              <a:rPr lang="en-US" sz="1150" b="1" dirty="0">
+                <a:solidFill>
+                  <a:srgbClr val="0D1B5E"/>
+                </a:solidFill>
+                <a:latin typeface="Calibri"/>
+                <a:ea typeface="Calibri"/>
+                <a:cs typeface="Calibri"/>
+              </a:rPr>
+              <a:t> </a:t>
+            </a:r>
+            <a:r>
+              <a:rPr lang="en-US" sz="1150" b="1" dirty="0" err="1">
+                <a:solidFill>
+                  <a:srgbClr val="0D1B5E"/>
+                </a:solidFill>
+                <a:latin typeface="Calibri"/>
+                <a:ea typeface="Calibri"/>
+                <a:cs typeface="Calibri"/>
+              </a:rPr>
+              <a:t>en</a:t>
+            </a:r>
+            <a:r>
+              <a:rPr lang="en-US" sz="1150" b="1" dirty="0">
+                <a:solidFill>
+                  <a:srgbClr val="0D1B5E"/>
+                </a:solidFill>
+                <a:latin typeface="Calibri"/>
+                <a:ea typeface="Calibri"/>
+                <a:cs typeface="Calibri"/>
+              </a:rPr>
+              <a:t> </a:t>
+            </a:r>
+            <a:r>
+              <a:rPr lang="en-US" sz="1150" b="1" dirty="0" err="1">
+                <a:solidFill>
+                  <a:srgbClr val="0D1B5E"/>
+                </a:solidFill>
+                <a:latin typeface="Calibri"/>
+                <a:ea typeface="Calibri"/>
+                <a:cs typeface="Calibri"/>
+              </a:rPr>
+              <a:t>los</a:t>
+            </a:r>
+            <a:r>
+              <a:rPr lang="en-US" sz="1150" b="1" dirty="0">
+                <a:solidFill>
+                  <a:srgbClr val="0D1B5E"/>
+                </a:solidFill>
+                <a:latin typeface="Calibri"/>
+                <a:ea typeface="Calibri"/>
+                <a:cs typeface="Calibri"/>
+              </a:rPr>
+              <a:t> </a:t>
+            </a:r>
+            <a:r>
+              <a:rPr lang="en-US" sz="1150" b="1" dirty="0" err="1">
+                <a:solidFill>
+                  <a:srgbClr val="0D1B5E"/>
+                </a:solidFill>
+                <a:latin typeface="Calibri"/>
+                <a:ea typeface="Calibri"/>
+                <a:cs typeface="Calibri"/>
+              </a:rPr>
+              <a:t>conocimientos</a:t>
+            </a:r>
+            <a:r>
+              <a:rPr lang="en-US" sz="1150" b="1" dirty="0">
+                <a:solidFill>
+                  <a:srgbClr val="0D1B5E"/>
+                </a:solidFill>
+                <a:latin typeface="Calibri"/>
+                <a:ea typeface="Calibri"/>
+                <a:cs typeface="Calibri"/>
+              </a:rPr>
+              <a:t>) </a:t>
+            </a:r>
+            <a:r>
+              <a:rPr lang="en-US" sz="1150" b="1" dirty="0" err="1">
+                <a:solidFill>
+                  <a:srgbClr val="0D1B5E"/>
+                </a:solidFill>
+                <a:latin typeface="Calibri"/>
+                <a:ea typeface="Calibri"/>
+                <a:cs typeface="Calibri"/>
+              </a:rPr>
+              <a:t>como</a:t>
+            </a:r>
+            <a:r>
+              <a:rPr lang="en-US" sz="1150" b="1" dirty="0">
+                <a:solidFill>
+                  <a:srgbClr val="0D1B5E"/>
+                </a:solidFill>
+                <a:latin typeface="Calibri"/>
+                <a:ea typeface="Calibri"/>
+                <a:cs typeface="Calibri"/>
+              </a:rPr>
+              <a:t> </a:t>
+            </a:r>
+            <a:r>
+              <a:rPr lang="en-US" sz="1150" b="1" dirty="0" err="1">
+                <a:solidFill>
+                  <a:srgbClr val="0D1B5E"/>
+                </a:solidFill>
+                <a:latin typeface="Calibri"/>
+                <a:ea typeface="Calibri"/>
+                <a:cs typeface="Calibri"/>
+              </a:rPr>
+              <a:t>prerrequisito</a:t>
+            </a:r>
+            <a:endParaRPr lang="en-US" sz="1150" b="1" dirty="0">
+              <a:solidFill>
+                <a:srgbClr val="0D1B5E"/>
+              </a:solidFill>
+              <a:latin typeface="Calibri"/>
+              <a:ea typeface="Calibri"/>
+              <a:cs typeface="Calibri"/>
+            </a:endParaRPr>
           </a:p>
         </p:txBody>
       </p:sp>
@@ -14549,35 +14775,6 @@
                 <a:cs typeface="Calibri" pitchFamily="34" charset="-120"/>
               </a:rPr>
               <a:t>Fuente: </a:t>
-            </a:r>
-            <a:r>
-              <a:rPr lang="en-US" sz="750" u="sng" dirty="0">
-                <a:solidFill>
-                  <a:srgbClr val="8899BB"/>
-                </a:solidFill>
-                <a:latin typeface="Calibri" pitchFamily="34" charset="0"/>
-                <a:ea typeface="Calibri" pitchFamily="34" charset="-122"/>
-                <a:cs typeface="Calibri" pitchFamily="34" charset="-120"/>
-                <a:hlinkClick r:id="rId2">
-                  <a:extLst>
-                    <a:ext uri="{A12FA001-AC4F-418D-AE19-62706E023703}">
-                      <ahyp:hlinkClr xmlns:ahyp="http://schemas.microsoft.com/office/drawing/2018/hyperlinkcolor" val="tx"/>
-                    </a:ext>
-                  </a:extLst>
-                </a:hlinkClick>
-              </a:rPr>
-              <a:t>Dynatrace AI Observability Report 2025</a:t>
-            </a:r>
-            <a:r>
-              <a:rPr lang="en-US" sz="750" dirty="0">
-                <a:solidFill>
-                  <a:srgbClr val="8899BB"/>
-                </a:solidFill>
-                <a:latin typeface="Calibri" pitchFamily="34" charset="0"/>
-                <a:ea typeface="Calibri" pitchFamily="34" charset="-122"/>
-                <a:cs typeface="Calibri" pitchFamily="34" charset="-120"/>
-              </a:rPr>
-              <a:t>  ·  </a:t>
             </a:r>
             <a:r>
               <a:rPr lang="en-US" sz="750" u="sng" dirty="0">
@@ -14595,7 +14792,7 @@
                   </a:extLst>
                 </a:hlinkClick>
               </a:rPr>
-              <a:t>Gartner Agentic AI Hype Cycle 2025</a:t>
+              <a:t>Dynatrace AI Observability Report 2025</a:t>
             </a:r>
             <a:r>
               <a:rPr lang="en-US" sz="750" dirty="0">
@@ -14624,7 +14821,7 @@
                   </a:extLst>
                 </a:hlinkClick>
               </a:rPr>
-              <a:t>PeopleCert ITIL 4 AI Capability Model</a:t>
+              <a:t>Gartner Agentic AI Hype Cycle 2025</a:t>
             </a:r>
             <a:r>
               <a:rPr lang="en-US" sz="750" dirty="0">
@@ -14646,6 +14843,35 @@
                 <a:ea typeface="Calibri" pitchFamily="34" charset="-122"/>
                 <a:cs typeface="Calibri" pitchFamily="34" charset="-120"/>
                 <a:hlinkClick r:id="rId5">
+                  <a:extLst>
+                    <a:ext uri="{A12FA001-AC4F-418D-AE19-62706E023703}">
+                      <ahyp:hlinkClr xmlns:ahyp="http://schemas.microsoft.com/office/drawing/2018/hyperlinkcolor" val="tx"/>
+                    </a:ext>
+                  </a:extLst>
+                </a:hlinkClick>
+              </a:rPr>
+              <a:t>PeopleCert ITIL 4 AI Capability Model</a:t>
+            </a:r>
+            <a:r>
+              <a:rPr lang="en-US" sz="750" dirty="0">
+                <a:solidFill>
+                  <a:srgbClr val="8899BB"/>
+                </a:solidFill>
+                <a:latin typeface="Calibri" pitchFamily="34" charset="0"/>
+                <a:ea typeface="Calibri" pitchFamily="34" charset="-122"/>
+                <a:cs typeface="Calibri" pitchFamily="34" charset="-120"/>
+              </a:rPr>
+              <a:t>  ·  </a:t>
+            </a:r>
+            <a:r>
+              <a:rPr lang="en-US" sz="750" u="sng" dirty="0">
+                <a:solidFill>
+                  <a:srgbClr val="8899BB"/>
+                </a:solidFill>
+                <a:latin typeface="Calibri" pitchFamily="34" charset="0"/>
+                <a:ea typeface="Calibri" pitchFamily="34" charset="-122"/>
+                <a:cs typeface="Calibri" pitchFamily="34" charset="-120"/>
+                <a:hlinkClick r:id="rId6">
                   <a:extLst>
                     <a:ext uri="{A12FA001-AC4F-418D-AE19-62706E023703}">
                       <ahyp:hlinkClr xmlns:ahyp="http://schemas.microsoft.com/office/drawing/2018/hyperlinkcolor" val="tx"/>
@@ -15722,8 +15948,8 @@
         </p:nvSpPr>
         <p:spPr>
           <a:xfrm>
-            <a:off x="7381242" y="1209930"/>
-            <a:ext cx="621792" cy="237744"/>
+            <a:off x="7109100" y="1215372"/>
+            <a:ext cx="893934" cy="264959"/>
           </a:xfrm>
           <a:prstGeom prst="rect">
             <a:avLst/>
@@ -15732,27 +15958,23 @@
           <a:ln/>
         </p:spPr>
         <p:txBody>
-          <a:bodyPr wrap="square" rtlCol="0" anchor="ctr"/>
+          <a:bodyPr wrap="square" lIns="91440" tIns="45720" rIns="91440" bIns="45720" rtlCol="0" anchor="ctr"/>
           <a:lstStyle/>
           <a:p>
             <a:pPr marL="0" indent="0" algn="ctr">
               <a:buNone/>
             </a:pPr>
             <a:r>
-              <a:rPr lang="en-US" sz="900" b="1" dirty="0">
+              <a:rPr lang="en-US" sz="900" b="1" dirty="0" err="1">
                 <a:solidFill>
                   <a:srgbClr val="6B7280"/>
                 </a:solidFill>
-                <a:latin typeface="Reddit Sans" panose="020B0604020202020204" charset="0"/>
-                <a:ea typeface="Reddit Sans" panose="020B0604020202020204" charset="0"/>
-                <a:cs typeface="Calibri" pitchFamily="34" charset="-120"/>
-              </a:rPr>
-              <a:t>Trad.</a:t>
-            </a:r>
-            <a:endParaRPr lang="en-US" sz="900" dirty="0">
-              <a:latin typeface="Reddit Sans" panose="020B0604020202020204" charset="0"/>
-              <a:ea typeface="Reddit Sans" panose="020B0604020202020204" charset="0"/>
-            </a:endParaRPr>
+                <a:latin typeface="Reddit Sans"/>
+                <a:ea typeface="Reddit Sans"/>
+                <a:cs typeface="Calibri"/>
+              </a:rPr>
+              <a:t>Tradicional</a:t>
+            </a:r>
           </a:p>
         </p:txBody>
       </p:sp>
@@ -16034,26 +16256,38 @@
           <a:ln/>
         </p:spPr>
         <p:txBody>
-          <a:bodyPr wrap="square" rtlCol="0" anchor="ctr"/>
+          <a:bodyPr wrap="square" lIns="91440" tIns="45720" rIns="91440" bIns="45720" rtlCol="0" anchor="ctr"/>
           <a:lstStyle/>
           <a:p>
             <a:pPr marL="0" indent="0">
               <a:buNone/>
             </a:pPr>
             <a:r>
+              <a:rPr lang="en-US" sz="950" dirty="0" err="1">
+                <a:solidFill>
+                  <a:srgbClr val="1A1A2E"/>
+                </a:solidFill>
+                <a:latin typeface="Reddit Sans"/>
+                <a:ea typeface="Reddit Sans"/>
+                <a:cs typeface="Calibri"/>
+              </a:rPr>
+              <a:t>Reducción </a:t>
+            </a:r>
+            <a:r>
               <a:rPr lang="en-US" sz="950" dirty="0">
                 <a:solidFill>
                   <a:srgbClr val="1A1A2E"/>
                 </a:solidFill>
-                <a:latin typeface="Reddit Sans" panose="020B0604020202020204" charset="0"/>
-                <a:ea typeface="Reddit Sans" panose="020B0604020202020204" charset="0"/>
-                <a:cs typeface="Calibri" pitchFamily="34" charset="-120"/>
-              </a:rPr>
-              <a:t>Reduccion MTTR</a:t>
+                <a:latin typeface="Reddit Sans"/>
+                <a:ea typeface="Reddit Sans"/>
+                <a:cs typeface="Calibri"/>
+              </a:rPr>
+              <a:t>MTTR</a:t>
             </a:r>
             <a:endParaRPr lang="en-US" sz="950" dirty="0">
-              <a:latin typeface="Reddit Sans" panose="020B0604020202020204" charset="0"/>
-              <a:ea typeface="Reddit Sans" panose="020B0604020202020204" charset="0"/>
+              <a:latin typeface="Reddit Sans"/>
+              <a:ea typeface="Reddit Sans"/>
+              <a:cs typeface="Calibri"/>
             </a:endParaRPr>
           </a:p>
         </p:txBody>
@@ -16209,7 +16443,7 @@
           <a:ln/>
         </p:spPr>
         <p:txBody>
-          <a:bodyPr wrap="square" rtlCol="0" anchor="ctr"/>
+          <a:bodyPr wrap="square" lIns="91440" tIns="45720" rIns="91440" bIns="45720" rtlCol="0" anchor="ctr"/>
           <a:lstStyle/>
           <a:p>
             <a:pPr marL="0" indent="0">
@@ -16220,13 +16454,24 @@
                 <a:solidFill>
                   <a:srgbClr val="1A1A2E"/>
                 </a:solidFill>
-                <a:latin typeface="Reddit Sans" panose="020B0604020202020204" charset="0"/>
-                <a:ea typeface="Reddit Sans" panose="020B0604020202020204" charset="0"/>
-                <a:cs typeface="Calibri" pitchFamily="34" charset="-120"/>
-              </a:rPr>
-              <a:t>Costo / interaccion</a:t>
-            </a:r>
-            <a:endParaRPr lang="en-US" sz="950" dirty="0">
+                <a:latin typeface="Reddit Sans"/>
+                <a:ea typeface="Reddit Sans"/>
+                <a:cs typeface="Calibri"/>
+              </a:rPr>
+              <a:t>Costo / </a:t>
+            </a:r>
+            <a:r>
+              <a:rPr lang="en-US" sz="950" dirty="0" err="1">
+                <a:solidFill>
+                  <a:srgbClr val="1A1A2E"/>
+                </a:solidFill>
+                <a:latin typeface="Reddit Sans"/>
+                <a:ea typeface="Reddit Sans"/>
+                <a:cs typeface="Calibri"/>
+              </a:rPr>
+              <a:t>interacción</a:t>
+            </a:r>
+            <a:endParaRPr lang="en-US" sz="950" dirty="0" err="1">
               <a:latin typeface="Reddit Sans" panose="020B0604020202020204" charset="0"/>
               <a:ea typeface="Reddit Sans" panose="020B0604020202020204" charset="0"/>
             </a:endParaRPr>
@@ -16384,26 +16629,38 @@
           <a:ln/>
         </p:spPr>
         <p:txBody>
-          <a:bodyPr wrap="square" rtlCol="0" anchor="ctr"/>
+          <a:bodyPr wrap="square" lIns="91440" tIns="45720" rIns="91440" bIns="45720" rtlCol="0" anchor="ctr"/>
           <a:lstStyle/>
           <a:p>
             <a:pPr marL="0" indent="0">
               <a:buNone/>
             </a:pPr>
             <a:r>
+              <a:rPr lang="en-US" sz="950" dirty="0" err="1">
+                <a:solidFill>
+                  <a:srgbClr val="1A1A2E"/>
+                </a:solidFill>
+                <a:latin typeface="Reddit Sans"/>
+                <a:ea typeface="Reddit Sans"/>
+                <a:cs typeface="Calibri"/>
+              </a:rPr>
+              <a:t>Deflección</a:t>
+            </a:r>
+            <a:r>
               <a:rPr lang="en-US" sz="950" dirty="0">
                 <a:solidFill>
                   <a:srgbClr val="1A1A2E"/>
                 </a:solidFill>
-                <a:latin typeface="Reddit Sans" panose="020B0604020202020204" charset="0"/>
-                <a:ea typeface="Reddit Sans" panose="020B0604020202020204" charset="0"/>
-                <a:cs typeface="Calibri" pitchFamily="34" charset="-120"/>
-              </a:rPr>
-              <a:t>Defleccion (Robinhood)</a:t>
+                <a:latin typeface="Reddit Sans"/>
+                <a:ea typeface="Reddit Sans"/>
+                <a:cs typeface="Calibri"/>
+              </a:rPr>
+              <a:t> (Robinhood)</a:t>
             </a:r>
             <a:endParaRPr lang="en-US" sz="950" dirty="0">
-              <a:latin typeface="Reddit Sans" panose="020B0604020202020204" charset="0"/>
-              <a:ea typeface="Reddit Sans" panose="020B0604020202020204" charset="0"/>
+              <a:latin typeface="Reddit Sans"/>
+              <a:ea typeface="Reddit Sans"/>
+              <a:cs typeface="Calibri"/>
             </a:endParaRPr>
           </a:p>
         </p:txBody>
@@ -16559,26 +16816,38 @@
           <a:ln/>
         </p:spPr>
         <p:txBody>
-          <a:bodyPr wrap="square" rtlCol="0" anchor="ctr"/>
+          <a:bodyPr wrap="square" lIns="91440" tIns="45720" rIns="91440" bIns="45720" rtlCol="0" anchor="ctr"/>
           <a:lstStyle/>
           <a:p>
             <a:pPr marL="0" indent="0">
               <a:buNone/>
             </a:pPr>
             <a:r>
+              <a:rPr lang="en-US" sz="950" dirty="0" err="1">
+                <a:solidFill>
+                  <a:srgbClr val="1A1A2E"/>
+                </a:solidFill>
+                <a:latin typeface="Reddit Sans"/>
+                <a:ea typeface="Reddit Sans"/>
+                <a:cs typeface="Calibri"/>
+              </a:rPr>
+              <a:t>Reducción</a:t>
+            </a:r>
+            <a:r>
               <a:rPr lang="en-US" sz="950" dirty="0">
                 <a:solidFill>
                   <a:srgbClr val="1A1A2E"/>
                 </a:solidFill>
-                <a:latin typeface="Reddit Sans" panose="020B0604020202020204" charset="0"/>
-                <a:ea typeface="Reddit Sans" panose="020B0604020202020204" charset="0"/>
-                <a:cs typeface="Calibri" pitchFamily="34" charset="-120"/>
-              </a:rPr>
-              <a:t>Reduccion tickets (Honeywell)</a:t>
+                <a:latin typeface="Reddit Sans"/>
+                <a:ea typeface="Reddit Sans"/>
+                <a:cs typeface="Calibri"/>
+              </a:rPr>
+              <a:t> tickets (Honeywell)</a:t>
             </a:r>
             <a:endParaRPr lang="en-US" sz="950" dirty="0">
-              <a:latin typeface="Reddit Sans" panose="020B0604020202020204" charset="0"/>
-              <a:ea typeface="Reddit Sans" panose="020B0604020202020204" charset="0"/>
+              <a:latin typeface="Reddit Sans"/>
+              <a:ea typeface="Reddit Sans"/>
+              <a:cs typeface="Calibri"/>
             </a:endParaRPr>
           </a:p>
         </p:txBody>
@@ -16734,26 +17003,60 @@
           <a:ln/>
         </p:spPr>
         <p:txBody>
-          <a:bodyPr wrap="square" rtlCol="0" anchor="ctr"/>
+          <a:bodyPr wrap="square" lIns="91440" tIns="45720" rIns="91440" bIns="45720" rtlCol="0" anchor="ctr"/>
           <a:lstStyle/>
           <a:p>
             <a:pPr marL="0" indent="0">
               <a:buNone/>
             </a:pPr>
             <a:r>
+              <a:rPr lang="en-US" sz="950" dirty="0" err="1">
+                <a:solidFill>
+                  <a:srgbClr val="1A1A2E"/>
+                </a:solidFill>
+                <a:latin typeface="Reddit Sans"/>
+                <a:ea typeface="Reddit Sans"/>
+                <a:cs typeface="Calibri"/>
+              </a:rPr>
+              <a:t>Resolución</a:t>
+            </a:r>
+            <a:r>
               <a:rPr lang="en-US" sz="950" dirty="0">
                 <a:solidFill>
                   <a:srgbClr val="1A1A2E"/>
                 </a:solidFill>
-                <a:latin typeface="Reddit Sans" panose="020B0604020202020204" charset="0"/>
-                <a:ea typeface="Reddit Sans" panose="020B0604020202020204" charset="0"/>
-                <a:cs typeface="Calibri" pitchFamily="34" charset="-120"/>
-              </a:rPr>
-              <a:t>Resolucion autonoma (Salesforce)</a:t>
+                <a:latin typeface="Reddit Sans"/>
+                <a:ea typeface="Reddit Sans"/>
+                <a:cs typeface="Calibri"/>
+              </a:rPr>
+              <a:t> </a:t>
+            </a:r>
+            <a:r>
+              <a:rPr lang="en-US" sz="950" dirty="0" err="1">
+                <a:solidFill>
+                  <a:srgbClr val="1A1A2E"/>
+                </a:solidFill>
+                <a:latin typeface="Reddit Sans"/>
+                <a:ea typeface="Reddit Sans"/>
+                <a:cs typeface="Calibri"/>
+              </a:rPr>
+              <a:t>autonoma</a:t>
+            </a:r>
+            <a:r>
+              <a:rPr lang="en-US" sz="950" dirty="0">
+                <a:solidFill>
+                  <a:srgbClr val="1A1A2E"/>
+                </a:solidFill>
+                <a:latin typeface="Reddit Sans"/>
+                <a:ea typeface="Reddit Sans"/>
+                <a:cs typeface="Calibri"/>
+              </a:rPr>
+              <a:t> (Salesforce)</a:t>
             </a:r>
             <a:endParaRPr lang="en-US" sz="950" dirty="0">
-              <a:latin typeface="Reddit Sans" panose="020B0604020202020204" charset="0"/>
-              <a:ea typeface="Reddit Sans" panose="020B0604020202020204" charset="0"/>
+              <a:latin typeface="Reddit Sans"/>
+              <a:ea typeface="Reddit Sans"/>
+              <a:cs typeface="Calibri"/>
             </a:endParaRPr>
           </a:p>
         </p:txBody>
@@ -17813,27 +18116,23 @@
           <a:ln/>
         </p:spPr>
         <p:txBody>
-          <a:bodyPr wrap="square" rtlCol="0" anchor="ctr"/>
+          <a:bodyPr wrap="square" lIns="91440" tIns="45720" rIns="91440" bIns="45720" rtlCol="0" anchor="ctr"/>
           <a:lstStyle/>
           <a:p>
             <a:pPr marL="0" indent="0">
               <a:buNone/>
             </a:pPr>
             <a:r>
-              <a:rPr lang="en-US" sz="1100" b="1" dirty="0">
+              <a:rPr lang="en-US" sz="1100" b="1">
                 <a:solidFill>
                   <a:srgbClr val="FFFFFF"/>
                 </a:solidFill>
-                <a:latin typeface="Reddit Sans" panose="020B0604020202020204" charset="0"/>
-                <a:ea typeface="Reddit Sans" panose="020B0604020202020204" charset="0"/>
-                <a:cs typeface="Calibri" pitchFamily="34" charset="-120"/>
-              </a:rPr>
-              <a:t>AIOps + Assessment estructurado</a:t>
-            </a:r>
-            <a:endParaRPr lang="en-US" sz="1100" dirty="0">
-              <a:latin typeface="Reddit Sans" panose="020B0604020202020204" charset="0"/>
-              <a:ea typeface="Reddit Sans" panose="020B0604020202020204" charset="0"/>
-            </a:endParaRPr>
+                <a:latin typeface="Reddit Sans"/>
+                <a:ea typeface="Reddit Sans"/>
+                <a:cs typeface="Calibri"/>
+              </a:rPr>
+              <a:t>AIOps</a:t>
+            </a:r>
           </a:p>
         </p:txBody>
       </p:sp>
@@ -18584,26 +18883,36 @@
           <a:ln/>
         </p:spPr>
         <p:txBody>
-          <a:bodyPr wrap="square" rtlCol="0" anchor="ctr"/>
+          <a:bodyPr wrap="square" lIns="91440" tIns="45720" rIns="91440" bIns="45720" rtlCol="0" anchor="ctr"/>
           <a:lstStyle/>
           <a:p>
-            <a:pPr marL="0" indent="0" algn="ctr">
-              <a:buNone/>
-            </a:pPr>
+            <a:pPr algn="ctr"/>
             <a:r>
               <a:rPr lang="en-US" sz="1100" b="1" dirty="0">
                 <a:solidFill>
                   <a:srgbClr val="B8FFD8"/>
                 </a:solidFill>
-                <a:latin typeface="Reddit Sans" panose="020B0604020202020204" charset="0"/>
-                <a:ea typeface="Reddit Sans" panose="020B0604020202020204" charset="0"/>
-                <a:cs typeface="Calibri" pitchFamily="34" charset="-120"/>
-              </a:rPr>
-              <a:t>Mesa Gen Next (N3-N5)</a:t>
-            </a:r>
-            <a:endParaRPr lang="en-US" sz="1100" dirty="0">
-              <a:latin typeface="Reddit Sans" panose="020B0604020202020204" charset="0"/>
-              <a:ea typeface="Reddit Sans" panose="020B0604020202020204" charset="0"/>
+                <a:latin typeface="Reddit Sans"/>
+                <a:ea typeface="Reddit Sans"/>
+                <a:cs typeface="Calibri"/>
+              </a:rPr>
+              <a:t>Mesa Nueva Generación </a:t>
+            </a:r>
+            <a:r>
+              <a:rPr lang="en-US" sz="1100" b="1">
+                <a:solidFill>
+                  <a:srgbClr val="B8FFD8"/>
+                </a:solidFill>
+                <a:latin typeface="Reddit Sans"/>
+                <a:ea typeface="Reddit Sans"/>
+                <a:cs typeface="Calibri"/>
+              </a:rPr>
+              <a:t>(N3-N5)</a:t>
+            </a:r>
+            <a:endParaRPr lang="en-US" sz="1100">
+              <a:latin typeface="Reddit Sans"/>
+              <a:ea typeface="Reddit Sans"/>
+              <a:cs typeface="Calibri"/>
             </a:endParaRPr>
           </a:p>
         </p:txBody>
@@ -18663,7 +18972,7 @@
           <a:ln/>
         </p:spPr>
         <p:txBody>
-          <a:bodyPr wrap="square" rtlCol="0" anchor="ctr"/>
+          <a:bodyPr wrap="square" lIns="91440" tIns="45720" rIns="91440" bIns="45720" rtlCol="0" anchor="ctr"/>
           <a:lstStyle/>
           <a:p>
             <a:pPr marL="0" indent="0">
@@ -18674,15 +18983,27 @@
                 <a:solidFill>
                   <a:srgbClr val="0D1B5E"/>
                 </a:solidFill>
-                <a:latin typeface="Reddit Sans" panose="020B0604020202020204" charset="0"/>
-                <a:ea typeface="Reddit Sans" panose="020B0604020202020204" charset="0"/>
-                <a:cs typeface="Calibri" pitchFamily="34" charset="-120"/>
-              </a:rPr>
-              <a:t>Modelo operativo</a:t>
-            </a:r>
-            <a:endParaRPr lang="en-US" sz="1100" dirty="0">
-              <a:latin typeface="Reddit Sans" panose="020B0604020202020204" charset="0"/>
-              <a:ea typeface="Reddit Sans" panose="020B0604020202020204" charset="0"/>
+                <a:latin typeface="Reddit Sans"/>
+                <a:ea typeface="Reddit Sans"/>
+                <a:cs typeface="Calibri"/>
+              </a:rPr>
+              <a:t>Modelo </a:t>
+            </a:r>
+            <a:r>
+              <a:rPr lang="es-CO" sz="1100" b="1">
+                <a:solidFill>
+                  <a:srgbClr val="0D1B5E"/>
+                </a:solidFill>
+                <a:latin typeface="Reddit Sans"/>
+                <a:ea typeface="Reddit Sans"/>
+                <a:cs typeface="Calibri"/>
+              </a:rPr>
+              <a:t>operativo</a:t>
+            </a:r>
+            <a:endParaRPr lang="es-CO" sz="1100">
+              <a:latin typeface="Reddit Sans"/>
+              <a:ea typeface="Reddit Sans"/>
+              <a:cs typeface="Calibri"/>
             </a:endParaRPr>
           </a:p>
         </p:txBody>
@@ -18900,26 +19221,27 @@
           <a:ln/>
         </p:spPr>
         <p:txBody>
-          <a:bodyPr wrap="square" rtlCol="0" anchor="ctr"/>
+          <a:bodyPr wrap="square" lIns="91440" tIns="45720" rIns="91440" bIns="45720" rtlCol="0" anchor="ctr"/>
           <a:lstStyle/>
           <a:p>
             <a:pPr marL="0" indent="0">
               <a:buNone/>
             </a:pPr>
             <a:r>
-              <a:rPr lang="en-US" sz="1100" b="1" dirty="0">
+              <a:rPr lang="es-CO" sz="1100" b="1">
                 <a:solidFill>
                   <a:srgbClr val="0D1B5E"/>
                 </a:solidFill>
-                <a:latin typeface="Reddit Sans" panose="020B0604020202020204" charset="0"/>
-                <a:ea typeface="Reddit Sans" panose="020B0604020202020204" charset="0"/>
-                <a:cs typeface="Calibri" pitchFamily="34" charset="-120"/>
+                <a:latin typeface="Reddit Sans"/>
+                <a:ea typeface="Reddit Sans"/>
+                <a:cs typeface="Calibri"/>
               </a:rPr>
               <a:t>Inteligencia</a:t>
             </a:r>
-            <a:endParaRPr lang="en-US" sz="1100" dirty="0">
-              <a:latin typeface="Reddit Sans" panose="020B0604020202020204" charset="0"/>
-              <a:ea typeface="Reddit Sans" panose="020B0604020202020204" charset="0"/>
+            <a:endParaRPr lang="es-CO" sz="1100">
+              <a:latin typeface="Reddit Sans"/>
+              <a:ea typeface="Reddit Sans"/>
+              <a:cs typeface="Calibri"/>
             </a:endParaRPr>
           </a:p>
         </p:txBody>
@@ -19137,24 +19459,24 @@
           <a:ln/>
         </p:spPr>
         <p:txBody>
-          <a:bodyPr wrap="square" rtlCol="0" anchor="ctr"/>
+          <a:bodyPr wrap="square" lIns="91440" tIns="45720" rIns="91440" bIns="45720" rtlCol="0" anchor="ctr"/>
           <a:lstStyle/>
           <a:p>
             <a:pPr marL="0" indent="0">
               <a:buNone/>
             </a:pPr>
             <a:r>
-              <a:rPr lang="en-US" sz="1100" b="1" dirty="0">
+              <a:rPr lang="en-US" sz="1100" b="1" dirty="0" err="1">
                 <a:solidFill>
                   <a:srgbClr val="0D1B5E"/>
                 </a:solidFill>
-                <a:latin typeface="Reddit Sans" panose="020B0604020202020204" charset="0"/>
-                <a:ea typeface="Reddit Sans" panose="020B0604020202020204" charset="0"/>
-                <a:cs typeface="Calibri" pitchFamily="34" charset="-120"/>
-              </a:rPr>
-              <a:t>Automatizacion</a:t>
-            </a:r>
-            <a:endParaRPr lang="en-US" sz="1100" dirty="0">
+                <a:latin typeface="Reddit Sans"/>
+                <a:ea typeface="Reddit Sans"/>
+                <a:cs typeface="Calibri"/>
+              </a:rPr>
+              <a:t>Automatización</a:t>
+            </a:r>
+            <a:endParaRPr lang="en-US" sz="1100" dirty="0" err="1">
               <a:latin typeface="Reddit Sans" panose="020B0604020202020204" charset="0"/>
               <a:ea typeface="Reddit Sans" panose="020B0604020202020204" charset="0"/>
             </a:endParaRPr>
@@ -19611,26 +19933,38 @@
           <a:ln/>
         </p:spPr>
         <p:txBody>
-          <a:bodyPr wrap="square" rtlCol="0" anchor="ctr"/>
+          <a:bodyPr wrap="square" lIns="91440" tIns="45720" rIns="91440" bIns="45720" rtlCol="0" anchor="ctr"/>
           <a:lstStyle/>
           <a:p>
             <a:pPr marL="0" indent="0">
               <a:buNone/>
             </a:pPr>
             <a:r>
+              <a:rPr lang="en-US" sz="1100" b="1" dirty="0" err="1">
+                <a:solidFill>
+                  <a:srgbClr val="0D1B5E"/>
+                </a:solidFill>
+                <a:latin typeface="Reddit Sans"/>
+                <a:ea typeface="Reddit Sans"/>
+                <a:cs typeface="Calibri"/>
+              </a:rPr>
+              <a:t>Medición</a:t>
+            </a:r>
+            <a:r>
               <a:rPr lang="en-US" sz="1100" b="1" dirty="0">
                 <a:solidFill>
                   <a:srgbClr val="0D1B5E"/>
                 </a:solidFill>
-                <a:latin typeface="Reddit Sans" panose="020B0604020202020204" charset="0"/>
-                <a:ea typeface="Reddit Sans" panose="020B0604020202020204" charset="0"/>
-                <a:cs typeface="Calibri" pitchFamily="34" charset="-120"/>
-              </a:rPr>
-              <a:t>Medicion de valor</a:t>
+                <a:latin typeface="Reddit Sans"/>
+                <a:ea typeface="Reddit Sans"/>
+                <a:cs typeface="Calibri"/>
+              </a:rPr>
+              <a:t> de valor</a:t>
             </a:r>
             <a:endParaRPr lang="en-US" sz="1100" dirty="0">
-              <a:latin typeface="Reddit Sans" panose="020B0604020202020204" charset="0"/>
-              <a:ea typeface="Reddit Sans" panose="020B0604020202020204" charset="0"/>
+              <a:latin typeface="Reddit Sans"/>
+              <a:ea typeface="Reddit Sans"/>
+              <a:cs typeface="Calibri"/>
             </a:endParaRPr>
           </a:p>
         </p:txBody>
@@ -19848,24 +20182,24 @@
           <a:ln/>
         </p:spPr>
         <p:txBody>
-          <a:bodyPr wrap="square" rtlCol="0" anchor="ctr"/>
+          <a:bodyPr wrap="square" lIns="91440" tIns="45720" rIns="91440" bIns="45720" rtlCol="0" anchor="ctr"/>
           <a:lstStyle/>
           <a:p>
             <a:pPr marL="0" indent="0">
               <a:buNone/>
             </a:pPr>
             <a:r>
-              <a:rPr lang="en-US" sz="1100" b="1" dirty="0">
+              <a:rPr lang="en-US" sz="1100" b="1" dirty="0" err="1">
                 <a:solidFill>
                   <a:srgbClr val="0D1B5E"/>
                 </a:solidFill>
-                <a:latin typeface="Reddit Sans" panose="020B0604020202020204" charset="0"/>
-                <a:ea typeface="Reddit Sans" panose="020B0604020202020204" charset="0"/>
-                <a:cs typeface="Calibri" pitchFamily="34" charset="-120"/>
-              </a:rPr>
-              <a:t>Evolucion</a:t>
-            </a:r>
-            <a:endParaRPr lang="en-US" sz="1100" dirty="0">
+                <a:latin typeface="Reddit Sans"/>
+                <a:ea typeface="Reddit Sans"/>
+                <a:cs typeface="Calibri"/>
+              </a:rPr>
+              <a:t>Evolución</a:t>
+            </a:r>
+            <a:endParaRPr lang="en-US" sz="1100" dirty="0" err="1">
               <a:latin typeface="Reddit Sans" panose="020B0604020202020204" charset="0"/>
               <a:ea typeface="Reddit Sans" panose="020B0604020202020204" charset="0"/>
             </a:endParaRPr>
@@ -23335,6 +23669,132 @@
   <p:cSld>
     <p:spTree>
       <p:nvGrpSpPr>
+        <p:cNvPr id="1" name=""/>
+        <p:cNvGrpSpPr/>
+        <p:nvPr/>
+      </p:nvGrpSpPr>
+      <p:grpSpPr>
+        <a:xfrm>
+          <a:off x="0" y="0"/>
+          <a:ext cx="0" cy="0"/>
+          <a:chOff x="0" y="0"/>
+          <a:chExt cx="0" cy="0"/>
+        </a:xfrm>
+      </p:grpSpPr>
+      <p:sp>
+        <p:nvSpPr>
+          <p:cNvPr id="2" name="Título 1">
+            <a:extLst>
+              <a:ext uri="{FF2B5EF4-FFF2-40B4-BE49-F238E27FC236}">
+                <a16:creationId xmlns:a16="http://schemas.microsoft.com/office/drawing/2014/main" id="{7736844F-A555-6B31-9B61-0014736055DC}"/>
+              </a:ext>
+            </a:extLst>
+          </p:cNvPr>
+          <p:cNvSpPr>
+            <a:spLocks noGrp="1"/>
+          </p:cNvSpPr>
+          <p:nvPr>
+            <p:ph type="title"/>
+          </p:nvPr>
+        </p:nvSpPr>
+        <p:spPr/>
+        <p:txBody>
+          <a:bodyPr/>
+          <a:lstStyle/>
+          <a:p>
+            <a:r>
+              <a:rPr lang="es-CO"/>
+              <a:t>Mesa de Servicio de Nueva Generación</a:t>
+            </a:r>
+            <a:endParaRPr lang="es-ES" b="0">
+              <a:solidFill>
+                <a:srgbClr val="000000"/>
+              </a:solidFill>
+            </a:endParaRPr>
+          </a:p>
+        </p:txBody>
+      </p:sp>
+      <p:sp>
+        <p:nvSpPr>
+          <p:cNvPr id="4" name="Text 3">
+            <a:extLst>
+              <a:ext uri="{FF2B5EF4-FFF2-40B4-BE49-F238E27FC236}">
+                <a16:creationId xmlns:a16="http://schemas.microsoft.com/office/drawing/2014/main" id="{147F5800-07BA-9795-E2BC-5921D7FB5CCE}"/>
+              </a:ext>
+            </a:extLst>
+          </p:cNvPr>
+          <p:cNvSpPr/>
+          <p:nvPr/>
+        </p:nvSpPr>
+        <p:spPr>
+          <a:xfrm>
+            <a:off x="320040" y="548640"/>
+            <a:ext cx="7772400" cy="320040"/>
+          </a:xfrm>
+          <a:prstGeom prst="rect">
+            <a:avLst/>
+          </a:prstGeom>
+          <a:noFill/>
+          <a:ln/>
+        </p:spPr>
+        <p:txBody>
+          <a:bodyPr wrap="square" lIns="91440" tIns="45720" rIns="91440" bIns="45720" rtlCol="0" anchor="ctr"/>
+          <a:lstStyle/>
+          <a:p>
+            <a:r>
+              <a:rPr lang="es-CO" sz="1100">
+                <a:solidFill>
+                  <a:srgbClr val="AABBDD"/>
+                </a:solidFill>
+                <a:latin typeface="Reddit Sans"/>
+                <a:ea typeface="Reddit Sans"/>
+                <a:cs typeface="Calibri"/>
+              </a:rPr>
+              <a:t>Diagrama</a:t>
+            </a:r>
+            <a:r>
+              <a:rPr lang="en-US" sz="1100" dirty="0">
+                <a:solidFill>
+                  <a:srgbClr val="AABBDD"/>
+                </a:solidFill>
+                <a:latin typeface="Reddit Sans"/>
+                <a:ea typeface="Reddit Sans"/>
+                <a:cs typeface="Calibri"/>
+              </a:rPr>
+              <a:t> de alto </a:t>
+            </a:r>
+            <a:r>
+              <a:rPr lang="es-CO" sz="1100">
+                <a:solidFill>
+                  <a:srgbClr val="AABBDD"/>
+                </a:solidFill>
+                <a:latin typeface="Reddit Sans"/>
+                <a:ea typeface="Reddit Sans"/>
+                <a:cs typeface="Calibri"/>
+              </a:rPr>
+              <a:t>nivel</a:t>
+            </a:r>
+          </a:p>
+        </p:txBody>
+      </p:sp>
+    </p:spTree>
+    <p:extLst>
+      <p:ext uri="{BB962C8B-B14F-4D97-AF65-F5344CB8AC3E}">
+        <p14:creationId xmlns:p14="http://schemas.microsoft.com/office/powerpoint/2010/main" val="596317129"/>
+      </p:ext>
+    </p:extLst>
+  </p:cSld>
+  <p:clrMapOvr>
+    <a:masterClrMapping/>
+  </p:clrMapOvr>
+</p:sld>
+</file>
+
+<file path=ppt/slides/slide19.xml><?xml version="1.0" encoding="utf-8"?>
+<p:sld xmlns:a="http://schemas.openxmlformats.org/drawingml/2006/main" xmlns:r="http://schemas.openxmlformats.org/officeDocument/2006/relationships" xmlns:p="http://schemas.openxmlformats.org/presentationml/2006/main">
+  <p:cSld>
+    <p:spTree>
+      <p:nvGrpSpPr>
         <p:cNvPr id="1" name="Shape 183"/>
         <p:cNvGrpSpPr/>
         <p:nvPr/>
@@ -23347,173 +23807,6 @@
           <a:chExt cx="0" cy="0"/>
         </a:xfrm>
       </p:grpSpPr>
-    </p:spTree>
-  </p:cSld>
-  <p:clrMapOvr>
-    <a:masterClrMapping/>
-  </p:clrMapOvr>
-</p:sld>
-</file>
-
-<file path=ppt/slides/slide19.xml><?xml version="1.0" encoding="utf-8"?>
-<p:sld xmlns:a="http://schemas.openxmlformats.org/drawingml/2006/main" xmlns:r="http://schemas.openxmlformats.org/officeDocument/2006/relationships" xmlns:p="http://schemas.openxmlformats.org/presentationml/2006/main">
-  <p:cSld>
-    <p:spTree>
-      <p:nvGrpSpPr>
-        <p:cNvPr id="1" name="Shape 187"/>
-        <p:cNvGrpSpPr/>
-        <p:nvPr/>
-      </p:nvGrpSpPr>
-      <p:grpSpPr>
-        <a:xfrm>
-          <a:off x="0" y="0"/>
-          <a:ext cx="0" cy="0"/>
-          <a:chOff x="0" y="0"/>
-          <a:chExt cx="0" cy="0"/>
-        </a:xfrm>
-      </p:grpSpPr>
-      <p:sp>
-        <p:nvSpPr>
-          <p:cNvPr id="188" name="Google Shape;188;p6"/>
-          <p:cNvSpPr txBox="1">
-            <a:spLocks noGrp="1"/>
-          </p:cNvSpPr>
-          <p:nvPr>
-            <p:ph type="title"/>
-          </p:nvPr>
-        </p:nvSpPr>
-        <p:spPr>
-          <a:xfrm>
-            <a:off x="4087108" y="4327063"/>
-            <a:ext cx="4548900" cy="393600"/>
-          </a:xfrm>
-          <a:prstGeom prst="rect">
-            <a:avLst/>
-          </a:prstGeom>
-        </p:spPr>
-        <p:txBody>
-          <a:bodyPr spcFirstLastPara="1" wrap="square" lIns="91425" tIns="91425" rIns="91425" bIns="91425" anchor="ctr" anchorCtr="0">
-            <a:normAutofit/>
-          </a:bodyPr>
-          <a:lstStyle/>
-          <a:p>
-            <a:pPr marL="0" lvl="0" indent="0" algn="r" rtl="0">
-              <a:spcBef>
-                <a:spcPts val="0"/>
-              </a:spcBef>
-              <a:spcAft>
-                <a:spcPts val="0"/>
-              </a:spcAft>
-              <a:buNone/>
-            </a:pPr>
-            <a:r>
-              <a:rPr lang="es"/>
-              <a:t>We make it happen</a:t>
-            </a:r>
-            <a:endParaRPr/>
-          </a:p>
-        </p:txBody>
-      </p:sp>
-      <p:sp>
-        <p:nvSpPr>
-          <p:cNvPr id="189" name="Google Shape;189;p6"/>
-          <p:cNvSpPr txBox="1">
-            <a:spLocks noGrp="1"/>
-          </p:cNvSpPr>
-          <p:nvPr>
-            <p:ph type="ctrTitle" idx="2"/>
-          </p:nvPr>
-        </p:nvSpPr>
-        <p:spPr>
-          <a:xfrm>
-            <a:off x="450000" y="1827750"/>
-            <a:ext cx="8100000" cy="1596900"/>
-          </a:xfrm>
-          <a:prstGeom prst="rect">
-            <a:avLst/>
-          </a:prstGeom>
-        </p:spPr>
-        <p:txBody>
-          <a:bodyPr spcFirstLastPara="1" wrap="square" lIns="91425" tIns="91425" rIns="91425" bIns="91425" anchor="ctr" anchorCtr="0">
-            <a:normAutofit/>
-          </a:bodyPr>
-          <a:lstStyle/>
-          <a:p>
-            <a:pPr marL="0" lvl="0" indent="0" algn="ctr" rtl="0">
-              <a:spcBef>
-                <a:spcPts val="0"/>
-              </a:spcBef>
-              <a:spcAft>
-                <a:spcPts val="0"/>
-              </a:spcAft>
-              <a:buNone/>
-            </a:pPr>
-            <a:r>
-              <a:rPr lang="es"/>
-              <a:t>¡Gracias!</a:t>
-            </a:r>
-            <a:endParaRPr/>
-          </a:p>
-        </p:txBody>
-      </p:sp>
-      <p:sp>
-        <p:nvSpPr>
-          <p:cNvPr id="190" name="Google Shape;190;p6"/>
-          <p:cNvSpPr txBox="1">
-            <a:spLocks noGrp="1"/>
-          </p:cNvSpPr>
-          <p:nvPr>
-            <p:ph type="title" idx="3"/>
-          </p:nvPr>
-        </p:nvSpPr>
-        <p:spPr>
-          <a:xfrm>
-            <a:off x="4087108" y="446138"/>
-            <a:ext cx="4548900" cy="393600"/>
-          </a:xfrm>
-          <a:prstGeom prst="rect">
-            <a:avLst/>
-          </a:prstGeom>
-        </p:spPr>
-        <p:txBody>
-          <a:bodyPr spcFirstLastPara="1" wrap="square" lIns="91425" tIns="91425" rIns="91425" bIns="91425" anchor="ctr" anchorCtr="0">
-            <a:normAutofit fontScale="90000"/>
-          </a:bodyPr>
-          <a:lstStyle/>
-          <a:p>
-            <a:pPr marL="0" lvl="0" indent="0" algn="r" rtl="0">
-              <a:spcBef>
-                <a:spcPts val="0"/>
-              </a:spcBef>
-              <a:spcAft>
-                <a:spcPts val="0"/>
-              </a:spcAft>
-              <a:buNone/>
-            </a:pPr>
-            <a:r>
-              <a:rPr lang="es"/>
-              <a:t>Centro Empresarial Ciudad del Río C2, Cra. 48 #20-114, Oficina 1026</a:t>
-            </a:r>
-            <a:endParaRPr/>
-          </a:p>
-          <a:p>
-            <a:pPr marL="0" lvl="0" indent="0" algn="r" rtl="0">
-              <a:spcBef>
-                <a:spcPts val="0"/>
-              </a:spcBef>
-              <a:spcAft>
-                <a:spcPts val="0"/>
-              </a:spcAft>
-              <a:buNone/>
-            </a:pPr>
-            <a:r>
-              <a:rPr lang="es"/>
-              <a:t> +57 324 549 77 70</a:t>
-            </a:r>
-            <a:endParaRPr/>
-          </a:p>
-        </p:txBody>
-      </p:sp>
     </p:spTree>
   </p:cSld>
   <p:clrMapOvr>
@@ -24071,6 +24364,173 @@
               </a:lnSpc>
             </a:pPr>
             <a:endParaRPr lang="es-ES"/>
+          </a:p>
+        </p:txBody>
+      </p:sp>
+    </p:spTree>
+  </p:cSld>
+  <p:clrMapOvr>
+    <a:masterClrMapping/>
+  </p:clrMapOvr>
+</p:sld>
+</file>
+
+<file path=ppt/slides/slide20.xml><?xml version="1.0" encoding="utf-8"?>
+<p:sld xmlns:a="http://schemas.openxmlformats.org/drawingml/2006/main" xmlns:r="http://schemas.openxmlformats.org/officeDocument/2006/relationships" xmlns:p="http://schemas.openxmlformats.org/presentationml/2006/main">
+  <p:cSld>
+    <p:spTree>
+      <p:nvGrpSpPr>
+        <p:cNvPr id="1" name="Shape 187"/>
+        <p:cNvGrpSpPr/>
+        <p:nvPr/>
+      </p:nvGrpSpPr>
+      <p:grpSpPr>
+        <a:xfrm>
+          <a:off x="0" y="0"/>
+          <a:ext cx="0" cy="0"/>
+          <a:chOff x="0" y="0"/>
+          <a:chExt cx="0" cy="0"/>
+        </a:xfrm>
+      </p:grpSpPr>
+      <p:sp>
+        <p:nvSpPr>
+          <p:cNvPr id="188" name="Google Shape;188;p6"/>
+          <p:cNvSpPr txBox="1">
+            <a:spLocks noGrp="1"/>
+          </p:cNvSpPr>
+          <p:nvPr>
+            <p:ph type="title"/>
+          </p:nvPr>
+        </p:nvSpPr>
+        <p:spPr>
+          <a:xfrm>
+            <a:off x="4087108" y="4327063"/>
+            <a:ext cx="4548900" cy="393600"/>
+          </a:xfrm>
+          <a:prstGeom prst="rect">
+            <a:avLst/>
+          </a:prstGeom>
+        </p:spPr>
+        <p:txBody>
+          <a:bodyPr spcFirstLastPara="1" wrap="square" lIns="91425" tIns="91425" rIns="91425" bIns="91425" anchor="ctr" anchorCtr="0">
+            <a:normAutofit/>
+          </a:bodyPr>
+          <a:lstStyle/>
+          <a:p>
+            <a:pPr marL="0" lvl="0" indent="0" algn="r" rtl="0">
+              <a:spcBef>
+                <a:spcPts val="0"/>
+              </a:spcBef>
+              <a:spcAft>
+                <a:spcPts val="0"/>
+              </a:spcAft>
+              <a:buNone/>
+            </a:pPr>
+            <a:r>
+              <a:rPr lang="es"/>
+              <a:t>We make it happen</a:t>
+            </a:r>
+            <a:endParaRPr/>
+          </a:p>
+        </p:txBody>
+      </p:sp>
+      <p:sp>
+        <p:nvSpPr>
+          <p:cNvPr id="189" name="Google Shape;189;p6"/>
+          <p:cNvSpPr txBox="1">
+            <a:spLocks noGrp="1"/>
+          </p:cNvSpPr>
+          <p:nvPr>
+            <p:ph type="ctrTitle" idx="2"/>
+          </p:nvPr>
+        </p:nvSpPr>
+        <p:spPr>
+          <a:xfrm>
+            <a:off x="450000" y="1827750"/>
+            <a:ext cx="8100000" cy="1596900"/>
+          </a:xfrm>
+          <a:prstGeom prst="rect">
+            <a:avLst/>
+          </a:prstGeom>
+        </p:spPr>
+        <p:txBody>
+          <a:bodyPr spcFirstLastPara="1" wrap="square" lIns="91425" tIns="91425" rIns="91425" bIns="91425" anchor="ctr" anchorCtr="0">
+            <a:normAutofit/>
+          </a:bodyPr>
+          <a:lstStyle/>
+          <a:p>
+            <a:pPr marL="0" lvl="0" indent="0" algn="ctr" rtl="0">
+              <a:spcBef>
+                <a:spcPts val="0"/>
+              </a:spcBef>
+              <a:spcAft>
+                <a:spcPts val="0"/>
+              </a:spcAft>
+              <a:buNone/>
+            </a:pPr>
+            <a:r>
+              <a:rPr lang="es"/>
+              <a:t>¡Gracias!</a:t>
+            </a:r>
+            <a:endParaRPr/>
+          </a:p>
+        </p:txBody>
+      </p:sp>
+      <p:sp>
+        <p:nvSpPr>
+          <p:cNvPr id="190" name="Google Shape;190;p6"/>
+          <p:cNvSpPr txBox="1">
+            <a:spLocks noGrp="1"/>
+          </p:cNvSpPr>
+          <p:nvPr>
+            <p:ph type="title" idx="3"/>
+          </p:nvPr>
+        </p:nvSpPr>
+        <p:spPr>
+          <a:xfrm>
+            <a:off x="4087108" y="446138"/>
+            <a:ext cx="4548900" cy="393600"/>
+          </a:xfrm>
+          <a:prstGeom prst="rect">
+            <a:avLst/>
+          </a:prstGeom>
+        </p:spPr>
+        <p:txBody>
+          <a:bodyPr spcFirstLastPara="1" wrap="square" lIns="91425" tIns="91425" rIns="91425" bIns="91425" anchor="ctr" anchorCtr="0">
+            <a:normAutofit fontScale="90000"/>
+          </a:bodyPr>
+          <a:lstStyle/>
+          <a:p>
+            <a:pPr marL="0" lvl="0" indent="0" algn="r" rtl="0">
+              <a:spcBef>
+                <a:spcPts val="0"/>
+              </a:spcBef>
+              <a:spcAft>
+                <a:spcPts val="0"/>
+              </a:spcAft>
+              <a:buNone/>
+            </a:pPr>
+            <a:r>
+              <a:rPr lang="es"/>
+              <a:t>Centro Empresarial Ciudad del Río C2, Cra. 48 #20-114, Oficina 1026</a:t>
+            </a:r>
+            <a:endParaRPr/>
+          </a:p>
+          <a:p>
+            <a:pPr marL="0" lvl="0" indent="0" algn="r" rtl="0">
+              <a:spcBef>
+                <a:spcPts val="0"/>
+              </a:spcBef>
+              <a:spcAft>
+                <a:spcPts val="0"/>
+              </a:spcAft>
+              <a:buNone/>
+            </a:pPr>
+            <a:r>
+              <a:rPr lang="es"/>
+              <a:t> +57 324 549 77 70</a:t>
+            </a:r>
+            <a:endParaRPr/>
           </a:p>
         </p:txBody>
       </p:sp>
@@ -27402,10 +27862,6 @@
               <a:lnSpc>
                 <a:spcPct val="115000"/>
               </a:lnSpc>
-              <a:spcBef>
-                <a:spcPts val="0"/>
-              </a:spcBef>
-              <a:buNone/>
             </a:pPr>
             <a:r>
               <a:rPr lang="es" sz="900">
@@ -27413,7 +27869,7 @@
                   <a:srgbClr val="666666"/>
                 </a:solidFill>
               </a:rPr>
-              <a:t>Reactivo total. Conocimiento en personas. Bus factor alto.</a:t>
+              <a:t>Reactivo total. Conocimiento en personas. Bus factor alto (rotación).</a:t>
             </a:r>
           </a:p>
         </p:txBody>
@@ -27705,43 +28161,6 @@
                 </a:solidFill>
               </a:rPr>
               <a:t>Autónomo e Inteligente</a:t>
-            </a:r>
-          </a:p>
-        </p:txBody>
-      </p:sp>
-      <p:sp>
-        <p:nvSpPr>
-          <p:cNvPr id="40" name="nota estrella"/>
-          <p:cNvSpPr txBox="1"/>
-          <p:nvPr/>
-        </p:nvSpPr>
-        <p:spPr>
-          <a:xfrm>
-            <a:off x="457200" y="4089857"/>
-            <a:ext cx="8229600" cy="342900"/>
-          </a:xfrm>
-          <a:prstGeom prst="rect">
-            <a:avLst/>
-          </a:prstGeom>
-          <a:noFill/>
-          <a:ln>
-            <a:noFill/>
-          </a:ln>
-        </p:spPr>
-        <p:txBody>
-          <a:bodyPr wrap="square" lIns="91425" tIns="91425" rIns="91425" bIns="91425" anchor="ctr"/>
-          <a:lstStyle/>
-          <a:p>
-            <a:pPr algn="l">
-              <a:buNone/>
-            </a:pPr>
-            <a:r>
-              <a:rPr lang="es" sz="900" i="1">
-                <a:solidFill>
-                  <a:srgbClr val="888888"/>
-                </a:solidFill>
-              </a:rPr>
-              <a:t>★ Nivel mínimo requerido para Mesa de Soporte · Objetivo Wave 1 (SURA + Bancolombia) · Q3 2026</a:t>
             </a:r>
           </a:p>
         </p:txBody>
@@ -27914,16 +28333,34 @@
           <a:lstStyle/>
           <a:p>
             <a:r>
-              <a:rPr lang="en-US" dirty="0">
-                <a:latin typeface="Reddit Sans" panose="020B0604020202020204" charset="0"/>
-                <a:ea typeface="Reddit Sans" panose="020B0604020202020204" charset="0"/>
-              </a:rPr>
-              <a:t>El Mercado Global ITSM</a:t>
-            </a:r>
-            <a:endParaRPr lang="es-CO" dirty="0">
-              <a:latin typeface="Reddit Sans" panose="020B0604020202020204" charset="0"/>
-              <a:ea typeface="Reddit Sans" panose="020B0604020202020204" charset="0"/>
-            </a:endParaRPr>
+              <a:rPr lang="en-US" dirty="0"/>
+              <a:t>El Mercado Global ITSM (</a:t>
+            </a:r>
+            <a:r>
+              <a:rPr lang="en-US" dirty="0" err="1"/>
+              <a:t>Gestión</a:t>
+            </a:r>
+            <a:r>
+              <a:rPr lang="en-US" dirty="0"/>
+              <a:t> integral de </a:t>
+            </a:r>
+            <a:r>
+              <a:rPr lang="en-US" dirty="0" err="1"/>
+              <a:t>los</a:t>
+            </a:r>
+            <a:r>
+              <a:rPr lang="en-US" dirty="0"/>
+              <a:t> </a:t>
+            </a:r>
+            <a:r>
+              <a:rPr lang="en-US" dirty="0" err="1"/>
+              <a:t>servicios</a:t>
+            </a:r>
+            <a:r>
+              <a:rPr lang="en-US" dirty="0"/>
+              <a:t> de TI)</a:t>
+            </a:r>
+            <a:endParaRPr lang="es-CO" dirty="0"/>
           </a:p>
         </p:txBody>
       </p:sp>
@@ -28469,8 +28906,8 @@
         </p:nvSpPr>
         <p:spPr>
           <a:xfrm>
-            <a:off x="6823596" y="1640022"/>
-            <a:ext cx="1783080" cy="530352"/>
+            <a:off x="6731066" y="1427751"/>
+            <a:ext cx="1864723" cy="530352"/>
           </a:xfrm>
           <a:prstGeom prst="rect">
             <a:avLst/>
@@ -28479,27 +28916,109 @@
           <a:ln/>
         </p:spPr>
         <p:txBody>
-          <a:bodyPr wrap="square" rtlCol="0" anchor="t"/>
+          <a:bodyPr wrap="square" lIns="91440" tIns="45720" rIns="91440" bIns="45720" rtlCol="0" anchor="t"/>
           <a:lstStyle/>
           <a:p>
-            <a:pPr marL="0" indent="0" algn="ctr">
-              <a:buNone/>
-            </a:pPr>
+            <a:pPr algn="ctr"/>
             <a:r>
               <a:rPr lang="en-US" sz="1000" dirty="0">
                 <a:solidFill>
                   <a:srgbClr val="6B7280"/>
                 </a:solidFill>
-                <a:latin typeface="Reddit Sans" panose="020B0604020202020204" charset="0"/>
-                <a:ea typeface="Reddit Sans" panose="020B0604020202020204" charset="0"/>
-                <a:cs typeface="Calibri" pitchFamily="34" charset="-120"/>
-              </a:rPr>
-              <a:t>CAGR Colombia</a:t>
-            </a:r>
-            <a:endParaRPr lang="en-US" sz="1000" dirty="0">
-              <a:latin typeface="Reddit Sans" panose="020B0604020202020204" charset="0"/>
-              <a:ea typeface="Reddit Sans" panose="020B0604020202020204" charset="0"/>
-            </a:endParaRPr>
+                <a:latin typeface="Reddit Sans"/>
+                <a:ea typeface="Reddit Sans"/>
+                <a:cs typeface="Calibri"/>
+              </a:rPr>
+              <a:t>CAGR </a:t>
+            </a:r>
+            <a:r>
+              <a:rPr lang="en-US" sz="700" dirty="0">
+                <a:solidFill>
+                  <a:srgbClr val="6B7280"/>
+                </a:solidFill>
+                <a:latin typeface="Reddit Sans"/>
+                <a:ea typeface="Reddit Sans"/>
+                <a:cs typeface="Calibri"/>
+              </a:rPr>
+              <a:t>(Tasa de </a:t>
+            </a:r>
+            <a:r>
+              <a:rPr lang="en-US" sz="700" dirty="0" err="1">
+                <a:solidFill>
+                  <a:srgbClr val="6B7280"/>
+                </a:solidFill>
+                <a:latin typeface="Reddit Sans"/>
+                <a:ea typeface="Reddit Sans"/>
+                <a:cs typeface="Calibri"/>
+              </a:rPr>
+              <a:t>crecimiento</a:t>
+            </a:r>
+            <a:r>
+              <a:rPr lang="en-US" sz="700" dirty="0">
+                <a:solidFill>
+                  <a:srgbClr val="6B7280"/>
+                </a:solidFill>
+                <a:latin typeface="Reddit Sans"/>
+                <a:ea typeface="Reddit Sans"/>
+                <a:cs typeface="Calibri"/>
+              </a:rPr>
+              <a:t> </a:t>
+            </a:r>
+            <a:r>
+              <a:rPr lang="en-US" sz="700" dirty="0" err="1">
+                <a:solidFill>
+                  <a:srgbClr val="6B7280"/>
+                </a:solidFill>
+                <a:latin typeface="Reddit Sans"/>
+                <a:ea typeface="Reddit Sans"/>
+                <a:cs typeface="Calibri"/>
+              </a:rPr>
+              <a:t>anual</a:t>
+            </a:r>
+            <a:r>
+              <a:rPr lang="en-US" sz="700" dirty="0">
+                <a:solidFill>
+                  <a:srgbClr val="6B7280"/>
+                </a:solidFill>
+                <a:latin typeface="Reddit Sans"/>
+                <a:ea typeface="Reddit Sans"/>
+                <a:cs typeface="Calibri"/>
+              </a:rPr>
+              <a:t> </a:t>
+            </a:r>
+            <a:r>
+              <a:rPr lang="en-US" sz="700" dirty="0" err="1">
+                <a:solidFill>
+                  <a:srgbClr val="6B7280"/>
+                </a:solidFill>
+                <a:latin typeface="Reddit Sans"/>
+                <a:ea typeface="Reddit Sans"/>
+                <a:cs typeface="Calibri"/>
+              </a:rPr>
+              <a:t>compuesta</a:t>
+            </a:r>
+            <a:r>
+              <a:rPr lang="en-US" sz="700" dirty="0">
+                <a:solidFill>
+                  <a:srgbClr val="6B7280"/>
+                </a:solidFill>
+                <a:latin typeface="Reddit Sans"/>
+                <a:ea typeface="Reddit Sans"/>
+                <a:cs typeface="Calibri"/>
+              </a:rPr>
+              <a:t>) </a:t>
+            </a:r>
+            <a:r>
+              <a:rPr lang="en-US" sz="1000" dirty="0">
+                <a:solidFill>
+                  <a:srgbClr val="6B7280"/>
+                </a:solidFill>
+                <a:latin typeface="Reddit Sans"/>
+                <a:ea typeface="Reddit Sans"/>
+                <a:cs typeface="Calibri"/>
+              </a:rPr>
+              <a:t>Colombia</a:t>
+            </a:r>
           </a:p>
           <a:p>
             <a:pPr marL="0" indent="0" algn="ctr">
@@ -28547,22 +29066,41 @@
           <a:ln/>
         </p:spPr>
         <p:txBody>
-          <a:bodyPr wrap="square" rtlCol="0" anchor="ctr"/>
+          <a:bodyPr wrap="square" lIns="91440" tIns="45720" rIns="91440" bIns="45720" rtlCol="0" anchor="ctr"/>
           <a:lstStyle/>
           <a:p>
-            <a:pPr marL="0" indent="0">
-              <a:buNone/>
-            </a:pPr>
             <a:r>
               <a:rPr lang="en-US" sz="1200" b="1" dirty="0">
                 <a:solidFill>
                   <a:srgbClr val="0D1B5E"/>
                 </a:solidFill>
-                <a:latin typeface="Reddit Sans" panose="020B0604020202020204" charset="0"/>
-                <a:ea typeface="Reddit Sans" panose="020B0604020202020204" charset="0"/>
-                <a:cs typeface="Calibri" pitchFamily="34" charset="-120"/>
-              </a:rPr>
-              <a:t>Mercado ITSM por region</a:t>
+                <a:latin typeface="Reddit Sans"/>
+                <a:ea typeface="Reddit Sans"/>
+                <a:cs typeface="Calibri"/>
+              </a:rPr>
+              <a:t>Mercado ITSM </a:t>
+            </a:r>
+            <a:r>
+              <a:rPr lang="en-US" sz="1200" b="1" dirty="0" err="1">
+                <a:solidFill>
+                  <a:srgbClr val="0D1B5E"/>
+                </a:solidFill>
+                <a:latin typeface="Reddit Sans"/>
+                <a:ea typeface="Reddit Sans"/>
+                <a:cs typeface="Calibri"/>
+              </a:rPr>
+              <a:t>por</a:t>
+            </a:r>
+            <a:r>
+              <a:rPr lang="en-US" sz="1200" b="1" dirty="0">
+                <a:solidFill>
+                  <a:srgbClr val="0D1B5E"/>
+                </a:solidFill>
+                <a:latin typeface="Reddit Sans"/>
+                <a:ea typeface="Reddit Sans"/>
+                <a:cs typeface="Calibri"/>
+              </a:rPr>
+              <a:t> Region</a:t>
             </a:r>
             <a:endParaRPr lang="en-US" sz="1200" dirty="0">
               <a:latin typeface="Reddit Sans" panose="020B0604020202020204" charset="0"/>
@@ -28586,14 +29124,14 @@
           <p:nvPr>
             <p:extLst>
               <p:ext uri="{D42A27DB-BD31-4B8C-83A1-F6EECF244321}">
-                <p14:modId xmlns:p14="http://schemas.microsoft.com/office/powerpoint/2010/main" val="679699584"/>
+                <p14:modId xmlns:p14="http://schemas.microsoft.com/office/powerpoint/2010/main" val="3411277301"/>
               </p:ext>
             </p:extLst>
           </p:nvPr>
         </p:nvGraphicFramePr>
         <p:xfrm>
           <a:off x="340500" y="2635804"/>
-          <a:ext cx="5486400" cy="1548384"/>
+          <a:ext cx="5486400" cy="1716024"/>
         </p:xfrm>
         <a:graphic>
           <a:graphicData uri="http://schemas.openxmlformats.org/drawingml/2006/table">
@@ -28707,17 +29245,96 @@
                         <a:buNone/>
                       </a:pPr>
                       <a:r>
+                        <a:rPr lang="en-US" sz="1100" b="1" dirty="0" err="1">
+                          <a:solidFill>
+                            <a:srgbClr val="FFFFFF"/>
+                          </a:solidFill>
+                          <a:latin typeface="Reddit Sans"/>
+                          <a:ea typeface="Reddit Sans"/>
+                          <a:cs typeface="Calibri"/>
+                        </a:rPr>
+                        <a:t>Tamaño</a:t>
+                      </a:r>
+                      <a:r>
                         <a:rPr lang="en-US" sz="1100" b="1" dirty="0">
                           <a:solidFill>
                             <a:srgbClr val="FFFFFF"/>
                           </a:solidFill>
-                          <a:latin typeface="Reddit Sans" panose="020B0604020202020204" charset="0"/>
-                          <a:ea typeface="Reddit Sans" panose="020B0604020202020204" charset="0"/>
-                          <a:cs typeface="Calibri" pitchFamily="34" charset="-120"/>
+                          <a:latin typeface="Reddit Sans"/>
+                          <a:ea typeface="Reddit Sans"/>
+                          <a:cs typeface="Calibri"/>
                         </a:rPr>
-                        <a:t>Tamano 2024-2026</a:t>
+                        <a:t> 2024-2026</a:t>
                       </a:r>
                       <a:endParaRPr lang="en-US" sz="1100" dirty="0">
+                        <a:latin typeface="Reddit Sans"/>
+                        <a:ea typeface="Reddit Sans"/>
+                        <a:cs typeface="Calibri"/>
+                      </a:endParaRPr>
+                    </a:p>
+                  </a:txBody>
+                  <a:tcPr>
+                    <a:lnL w="6350" cap="flat" cmpd="sng" algn="ctr">
+                      <a:solidFill>
+                        <a:srgbClr val="D1D5DB"/>
+                      </a:solidFill>
+                      <a:prstDash val="solid"/>
+                      <a:round/>
+                      <a:headEnd type="none" w="med" len="med"/>
+                      <a:tailEnd type="none" w="med" len="med"/>
+                    </a:lnL>
+                    <a:lnR w="6350" cap="flat" cmpd="sng" algn="ctr">
+                      <a:solidFill>
+                        <a:srgbClr val="D1D5DB"/>
+                      </a:solidFill>
+                      <a:prstDash val="solid"/>
+                      <a:round/>
+                      <a:headEnd type="none" w="med" len="med"/>
+                      <a:tailEnd type="none" w="med" len="med"/>
+                    </a:lnR>
+                    <a:lnT w="6350" cap="flat" cmpd="sng" algn="ctr">
+                      <a:solidFill>
+                        <a:srgbClr val="D1D5DB"/>
+                      </a:solidFill>
+                      <a:prstDash val="solid"/>
+                      <a:round/>
+                      <a:headEnd type="none" w="med" len="med"/>
+                      <a:tailEnd type="none" w="med" len="med"/>
+                    </a:lnT>
+                    <a:lnB w="6350" cap="flat" cmpd="sng" algn="ctr">
+                      <a:solidFill>
+                        <a:srgbClr val="D1D5DB"/>
+                      </a:solidFill>
+                      <a:prstDash val="solid"/>
+                      <a:round/>
+                      <a:headEnd type="none" w="med" len="med"/>
+                      <a:tailEnd type="none" w="med" len="med"/>
+                    </a:lnB>
+                    <a:solidFill>
+                      <a:srgbClr val="0D1B5E"/>
+                    </a:solidFill>
+                  </a:tcPr>
+                </a:tc>
+                <a:tc>
+                  <a:txBody>
+                    <a:bodyPr/>
+                    <a:lstStyle/>
+                    <a:p>
+                      <a:pPr marL="0" indent="0" algn="ctr">
+                        <a:buNone/>
+                      </a:pPr>
+                      <a:r>
+                        <a:rPr lang="en-US" sz="1100" b="1" dirty="0" err="1">
+                          <a:solidFill>
+                            <a:srgbClr val="FFFFFF"/>
+                          </a:solidFill>
+                          <a:latin typeface="Reddit Sans"/>
+                          <a:ea typeface="Reddit Sans"/>
+                          <a:cs typeface="Calibri"/>
+                        </a:rPr>
+                        <a:t>Proyección</a:t>
+                      </a:r>
+                      <a:endParaRPr lang="en-US" sz="1100" dirty="0" err="1">
                         <a:latin typeface="Reddit Sans" panose="020B0604020202020204" charset="0"/>
                         <a:ea typeface="Reddit Sans" panose="020B0604020202020204" charset="0"/>
                         <a:cs typeface="Calibri" charset="0"/>
@@ -28779,81 +29396,104 @@
                           <a:solidFill>
                             <a:srgbClr val="FFFFFF"/>
                           </a:solidFill>
-                          <a:latin typeface="Reddit Sans" panose="020B0604020202020204" charset="0"/>
-                          <a:ea typeface="Reddit Sans" panose="020B0604020202020204" charset="0"/>
-                          <a:cs typeface="Calibri" pitchFamily="34" charset="-120"/>
+                          <a:latin typeface="Reddit Sans"/>
+                          <a:ea typeface="Reddit Sans"/>
+                          <a:cs typeface="Calibri"/>
                         </a:rPr>
-                        <a:t>Proyeccion</a:t>
+                        <a:t>CAGR </a:t>
                       </a:r>
-                      <a:endParaRPr lang="en-US" sz="1100" dirty="0">
-                        <a:latin typeface="Reddit Sans" panose="020B0604020202020204" charset="0"/>
-                        <a:ea typeface="Reddit Sans" panose="020B0604020202020204" charset="0"/>
-                        <a:cs typeface="Calibri" charset="0"/>
-                      </a:endParaRPr>
-                    </a:p>
-                  </a:txBody>
-                  <a:tcPr>
-                    <a:lnL w="6350" cap="flat" cmpd="sng" algn="ctr">
-                      <a:solidFill>
-                        <a:srgbClr val="D1D5DB"/>
-                      </a:solidFill>
-                      <a:prstDash val="solid"/>
-                      <a:round/>
-                      <a:headEnd type="none" w="med" len="med"/>
-                      <a:tailEnd type="none" w="med" len="med"/>
-                    </a:lnL>
-                    <a:lnR w="6350" cap="flat" cmpd="sng" algn="ctr">
-                      <a:solidFill>
-                        <a:srgbClr val="D1D5DB"/>
-                      </a:solidFill>
-                      <a:prstDash val="solid"/>
-                      <a:round/>
-                      <a:headEnd type="none" w="med" len="med"/>
-                      <a:tailEnd type="none" w="med" len="med"/>
-                    </a:lnR>
-                    <a:lnT w="6350" cap="flat" cmpd="sng" algn="ctr">
-                      <a:solidFill>
-                        <a:srgbClr val="D1D5DB"/>
-                      </a:solidFill>
-                      <a:prstDash val="solid"/>
-                      <a:round/>
-                      <a:headEnd type="none" w="med" len="med"/>
-                      <a:tailEnd type="none" w="med" len="med"/>
-                    </a:lnT>
-                    <a:lnB w="6350" cap="flat" cmpd="sng" algn="ctr">
-                      <a:solidFill>
-                        <a:srgbClr val="D1D5DB"/>
-                      </a:solidFill>
-                      <a:prstDash val="solid"/>
-                      <a:round/>
-                      <a:headEnd type="none" w="med" len="med"/>
-                      <a:tailEnd type="none" w="med" len="med"/>
-                    </a:lnB>
-                    <a:solidFill>
-                      <a:srgbClr val="0D1B5E"/>
-                    </a:solidFill>
-                  </a:tcPr>
-                </a:tc>
-                <a:tc>
-                  <a:txBody>
-                    <a:bodyPr/>
-                    <a:lstStyle/>
-                    <a:p>
-                      <a:pPr marL="0" indent="0" algn="ctr">
-                        <a:buNone/>
-                      </a:pPr>
                       <a:r>
                         <a:rPr lang="en-US" sz="1100" b="1" dirty="0">
                           <a:solidFill>
-                            <a:srgbClr val="FFFFFF"/>
+                            <a:schemeClr val="bg1"/>
                           </a:solidFill>
-                          <a:latin typeface="Reddit Sans" panose="020B0604020202020204" charset="0"/>
-                          <a:ea typeface="Reddit Sans" panose="020B0604020202020204" charset="0"/>
-                          <a:cs typeface="Calibri" pitchFamily="34" charset="-120"/>
+                          <a:latin typeface="Reddit Sans"/>
+                          <a:ea typeface="Reddit Sans"/>
+                          <a:cs typeface="Calibri"/>
                         </a:rPr>
-                        <a:t>CAGR</a:t>
+                        <a:t>(</a:t>
+                      </a:r>
+                      <a:r>
+                        <a:rPr lang="en-US" sz="800" b="0" i="0" u="none" strike="noStrike" noProof="0" dirty="0">
+                          <a:solidFill>
+                            <a:schemeClr val="bg1"/>
+                          </a:solidFill>
+                          <a:latin typeface="Reddit Sans"/>
+                          <a:ea typeface="Reddit Sans"/>
+                          <a:cs typeface="Calibri"/>
+                        </a:rPr>
+                        <a:t>Tasa de </a:t>
+                      </a:r>
+                      <a:r>
+                        <a:rPr lang="en-US" sz="800" b="0" i="0" u="none" strike="noStrike" noProof="0" dirty="0" err="1">
+                          <a:solidFill>
+                            <a:schemeClr val="bg1"/>
+                          </a:solidFill>
+                          <a:latin typeface="Reddit Sans"/>
+                          <a:ea typeface="Reddit Sans"/>
+                          <a:cs typeface="Calibri"/>
+                        </a:rPr>
+                        <a:t>crecimiento</a:t>
+                      </a:r>
+                      <a:r>
+                        <a:rPr lang="en-US" sz="800" b="0" i="0" u="none" strike="noStrike" noProof="0" dirty="0">
+                          <a:solidFill>
+                            <a:schemeClr val="bg1"/>
+                          </a:solidFill>
+                          <a:latin typeface="Reddit Sans"/>
+                          <a:ea typeface="Reddit Sans"/>
+                          <a:cs typeface="Calibri"/>
+                        </a:rPr>
+                        <a:t> </a:t>
+                      </a:r>
+                      <a:r>
+                        <a:rPr lang="en-US" sz="800" b="0" i="0" u="none" strike="noStrike" noProof="0" dirty="0" err="1">
+                          <a:solidFill>
+                            <a:schemeClr val="bg1"/>
+                          </a:solidFill>
+                          <a:latin typeface="Reddit Sans"/>
+                          <a:ea typeface="Reddit Sans"/>
+                          <a:cs typeface="Calibri"/>
+                        </a:rPr>
+                        <a:t>anual</a:t>
+                      </a:r>
+                      <a:r>
+                        <a:rPr lang="en-US" sz="800" b="0" i="0" u="none" strike="noStrike" noProof="0" dirty="0">
+                          <a:solidFill>
+                            <a:schemeClr val="bg1"/>
+                          </a:solidFill>
+                          <a:latin typeface="Reddit Sans"/>
+                          <a:ea typeface="Reddit Sans"/>
+                          <a:cs typeface="Calibri"/>
+                        </a:rPr>
+                        <a:t> </a:t>
+                      </a:r>
+                      <a:r>
+                        <a:rPr lang="en-US" sz="800" b="0" i="0" u="none" strike="noStrike" noProof="0" dirty="0" err="1">
+                          <a:solidFill>
+                            <a:schemeClr val="bg1"/>
+                          </a:solidFill>
+                          <a:latin typeface="Reddit Sans"/>
+                          <a:ea typeface="Reddit Sans"/>
+                          <a:cs typeface="Calibri"/>
+                        </a:rPr>
+                        <a:t>compuesta</a:t>
+                      </a:r>
+                      <a:r>
+                        <a:rPr lang="en-US" sz="1100" b="1" dirty="0">
+                          <a:solidFill>
+                            <a:schemeClr val="bg1"/>
+                          </a:solidFill>
+                          <a:latin typeface="Reddit Sans"/>
+                          <a:ea typeface="Reddit Sans"/>
+                          <a:cs typeface="Calibri"/>
+                        </a:rPr>
+                        <a:t>)</a:t>
                       </a:r>
                       <a:endParaRPr lang="en-US" sz="1100" dirty="0">
+                        <a:solidFill>
+                          <a:schemeClr val="bg1"/>
+                        </a:solidFill>
                         <a:latin typeface="Reddit Sans" panose="020B0604020202020204" charset="0"/>
                         <a:ea typeface="Reddit Sans" panose="020B0604020202020204" charset="0"/>
                         <a:cs typeface="Calibri" charset="0"/>
@@ -29770,7 +30410,7 @@
           <a:ln/>
         </p:spPr>
         <p:txBody>
-          <a:bodyPr wrap="square" rtlCol="0" anchor="ctr"/>
+          <a:bodyPr wrap="square" lIns="91440" tIns="45720" rIns="91440" bIns="45720" rtlCol="0" anchor="ctr"/>
           <a:lstStyle/>
           <a:p>
             <a:pPr marL="0" indent="0">
@@ -29781,13 +30421,24 @@
                 <a:solidFill>
                   <a:srgbClr val="1B7B85"/>
                 </a:solidFill>
-                <a:latin typeface="Reddit Sans" panose="020B0604020202020204" charset="0"/>
-                <a:ea typeface="Reddit Sans" panose="020B0604020202020204" charset="0"/>
-                <a:cs typeface="Calibri" pitchFamily="34" charset="-120"/>
-              </a:rPr>
-              <a:t>Colombia lidera</a:t>
-            </a:r>
-            <a:endParaRPr lang="en-US" sz="1300" dirty="0">
+                <a:latin typeface="Reddit Sans"/>
+                <a:ea typeface="Reddit Sans"/>
+                <a:cs typeface="Calibri"/>
+              </a:rPr>
+              <a:t>Colombia </a:t>
+            </a:r>
+            <a:r>
+              <a:rPr lang="en-US" sz="1300" b="1" dirty="0" err="1">
+                <a:solidFill>
+                  <a:srgbClr val="1B7B85"/>
+                </a:solidFill>
+                <a:latin typeface="Reddit Sans"/>
+                <a:ea typeface="Reddit Sans"/>
+                <a:cs typeface="Calibri"/>
+              </a:rPr>
+              <a:t>Lidera</a:t>
+            </a:r>
+            <a:endParaRPr lang="en-US" sz="1300" dirty="0" err="1">
               <a:latin typeface="Reddit Sans" panose="020B0604020202020204" charset="0"/>
               <a:ea typeface="Reddit Sans" panose="020B0604020202020204" charset="0"/>
             </a:endParaRPr>
@@ -29808,7 +30459,7 @@
         </p:nvSpPr>
         <p:spPr>
           <a:xfrm>
-            <a:off x="6101220" y="2763820"/>
+            <a:off x="6084891" y="2605977"/>
             <a:ext cx="2743200" cy="1664208"/>
           </a:xfrm>
           <a:prstGeom prst="rect">
@@ -29818,7 +30469,7 @@
           <a:ln/>
         </p:spPr>
         <p:txBody>
-          <a:bodyPr wrap="square" rtlCol="0" anchor="ctr"/>
+          <a:bodyPr wrap="square" lIns="91440" tIns="45720" rIns="91440" bIns="45720" rtlCol="0" anchor="ctr"/>
           <a:lstStyle/>
           <a:p>
             <a:pPr marL="342900" indent="-342900">
@@ -29833,15 +30484,27 @@
                 <a:solidFill>
                   <a:srgbClr val="0D1B5E"/>
                 </a:solidFill>
-                <a:latin typeface="Reddit Sans" panose="020B0604020202020204" charset="0"/>
-                <a:ea typeface="Reddit Sans" panose="020B0604020202020204" charset="0"/>
-                <a:cs typeface="Calibri" pitchFamily="34" charset="-120"/>
-              </a:rPr>
-              <a:t>9.8% CAGR IT Services — el mas alto de Sudamerica</a:t>
-            </a:r>
-            <a:endParaRPr lang="en-US" sz="1050" dirty="0">
-              <a:latin typeface="Reddit Sans" panose="020B0604020202020204" charset="0"/>
-              <a:ea typeface="Reddit Sans" panose="020B0604020202020204" charset="0"/>
+                <a:latin typeface="Reddit Sans"/>
+                <a:ea typeface="Reddit Sans"/>
+                <a:cs typeface="Calibri"/>
+              </a:rPr>
+              <a:t>9.8% CAGR IT Services — el mas alto de </a:t>
+            </a:r>
+            <a:r>
+              <a:rPr lang="en-US" sz="1050" dirty="0" err="1">
+                <a:solidFill>
+                  <a:srgbClr val="0D1B5E"/>
+                </a:solidFill>
+                <a:latin typeface="Reddit Sans"/>
+                <a:ea typeface="Reddit Sans"/>
+                <a:cs typeface="Calibri"/>
+              </a:rPr>
+              <a:t>Sudamerica</a:t>
+            </a:r>
+            <a:endParaRPr lang="en-US" sz="1050" dirty="0" err="1">
+              <a:latin typeface="Reddit Sans"/>
+              <a:ea typeface="Reddit Sans"/>
+              <a:cs typeface="Calibri"/>
             </a:endParaRPr>
           </a:p>
           <a:p>
@@ -29857,9 +30520,9 @@
                 <a:solidFill>
                   <a:srgbClr val="0D1B5E"/>
                 </a:solidFill>
-                <a:latin typeface="Reddit Sans" panose="020B0604020202020204" charset="0"/>
-                <a:ea typeface="Reddit Sans" panose="020B0604020202020204" charset="0"/>
-                <a:cs typeface="Calibri" pitchFamily="34" charset="-120"/>
+                <a:latin typeface="Reddit Sans"/>
+                <a:ea typeface="Reddit Sans"/>
+                <a:cs typeface="Calibri"/>
               </a:rPr>
               <a:t>Servicios</a:t>
             </a:r>
@@ -29868,15 +30531,93 @@
                 <a:solidFill>
                   <a:srgbClr val="0D1B5E"/>
                 </a:solidFill>
-                <a:latin typeface="Reddit Sans" panose="020B0604020202020204" charset="0"/>
-                <a:ea typeface="Reddit Sans" panose="020B0604020202020204" charset="0"/>
-                <a:cs typeface="Calibri" pitchFamily="34" charset="-120"/>
-              </a:rPr>
-              <a:t> crecen mas rapido que software licenciado</a:t>
-            </a:r>
-            <a:endParaRPr lang="en-US" sz="1050" dirty="0">
-              <a:latin typeface="Reddit Sans" panose="020B0604020202020204" charset="0"/>
-              <a:ea typeface="Reddit Sans" panose="020B0604020202020204" charset="0"/>
+                <a:latin typeface="Reddit Sans"/>
+                <a:ea typeface="Reddit Sans"/>
+                <a:cs typeface="Calibri"/>
+              </a:rPr>
+              <a:t> </a:t>
+            </a:r>
+            <a:r>
+              <a:rPr lang="en-US" sz="1050" dirty="0" err="1">
+                <a:solidFill>
+                  <a:srgbClr val="0D1B5E"/>
+                </a:solidFill>
+                <a:latin typeface="Reddit Sans"/>
+                <a:ea typeface="Reddit Sans"/>
+                <a:cs typeface="Calibri"/>
+              </a:rPr>
+              <a:t>crecen</a:t>
+            </a:r>
+            <a:r>
+              <a:rPr lang="en-US" sz="1050" dirty="0">
+                <a:solidFill>
+                  <a:srgbClr val="0D1B5E"/>
+                </a:solidFill>
+                <a:latin typeface="Reddit Sans"/>
+                <a:ea typeface="Reddit Sans"/>
+                <a:cs typeface="Calibri"/>
+              </a:rPr>
+              <a:t> mas </a:t>
+            </a:r>
+            <a:r>
+              <a:rPr lang="en-US" sz="1050" dirty="0" err="1">
+                <a:solidFill>
+                  <a:srgbClr val="0D1B5E"/>
+                </a:solidFill>
+                <a:latin typeface="Reddit Sans"/>
+                <a:ea typeface="Reddit Sans"/>
+                <a:cs typeface="Calibri"/>
+              </a:rPr>
+              <a:t>rapido</a:t>
+            </a:r>
+            <a:r>
+              <a:rPr lang="en-US" sz="1050" dirty="0">
+                <a:solidFill>
+                  <a:srgbClr val="0D1B5E"/>
+                </a:solidFill>
+                <a:latin typeface="Reddit Sans"/>
+                <a:ea typeface="Reddit Sans"/>
+                <a:cs typeface="Calibri"/>
+              </a:rPr>
+              <a:t> </a:t>
+            </a:r>
+            <a:r>
+              <a:rPr lang="en-US" sz="1050" dirty="0" err="1">
+                <a:solidFill>
+                  <a:srgbClr val="0D1B5E"/>
+                </a:solidFill>
+                <a:latin typeface="Reddit Sans"/>
+                <a:ea typeface="Reddit Sans"/>
+                <a:cs typeface="Calibri"/>
+              </a:rPr>
+              <a:t>que</a:t>
+            </a:r>
+            <a:r>
+              <a:rPr lang="en-US" sz="1050" dirty="0">
+                <a:solidFill>
+                  <a:srgbClr val="0D1B5E"/>
+                </a:solidFill>
+                <a:latin typeface="Reddit Sans"/>
+                <a:ea typeface="Reddit Sans"/>
+                <a:cs typeface="Calibri"/>
+              </a:rPr>
+              <a:t> software </a:t>
+            </a:r>
+            <a:r>
+              <a:rPr lang="en-US" sz="1050" dirty="0" err="1">
+                <a:solidFill>
+                  <a:srgbClr val="0D1B5E"/>
+                </a:solidFill>
+                <a:latin typeface="Reddit Sans"/>
+                <a:ea typeface="Reddit Sans"/>
+                <a:cs typeface="Calibri"/>
+              </a:rPr>
+              <a:t>licenciado</a:t>
+            </a:r>
+            <a:endParaRPr lang="en-US" sz="1050" dirty="0" err="1">
+              <a:latin typeface="Reddit Sans"/>
+              <a:ea typeface="Reddit Sans"/>
+              <a:cs typeface="Calibri"/>
             </a:endParaRPr>
           </a:p>
           <a:p>
@@ -29892,15 +30633,60 @@
                 <a:solidFill>
                   <a:srgbClr val="0D1B5E"/>
                 </a:solidFill>
-                <a:latin typeface="Reddit Sans" panose="020B0604020202020204" charset="0"/>
-                <a:ea typeface="Reddit Sans" panose="020B0604020202020204" charset="0"/>
-                <a:cs typeface="Calibri" pitchFamily="34" charset="-120"/>
-              </a:rPr>
-              <a:t>81% de la banca ya usa IA</a:t>
+                <a:latin typeface="Reddit Sans"/>
+                <a:ea typeface="Reddit Sans"/>
+                <a:cs typeface="Calibri"/>
+              </a:rPr>
+              <a:t>81% de la banca </a:t>
+            </a:r>
+            <a:r>
+              <a:rPr lang="en-US" sz="1050" dirty="0" err="1">
+                <a:solidFill>
+                  <a:srgbClr val="0D1B5E"/>
+                </a:solidFill>
+                <a:latin typeface="Reddit Sans"/>
+                <a:ea typeface="Reddit Sans"/>
+                <a:cs typeface="Calibri"/>
+              </a:rPr>
+              <a:t>ya</a:t>
+            </a:r>
+            <a:r>
+              <a:rPr lang="en-US" sz="1050" dirty="0">
+                <a:solidFill>
+                  <a:srgbClr val="0D1B5E"/>
+                </a:solidFill>
+                <a:latin typeface="Reddit Sans"/>
+                <a:ea typeface="Reddit Sans"/>
+                <a:cs typeface="Calibri"/>
+              </a:rPr>
+              <a:t> </a:t>
+            </a:r>
+            <a:r>
+              <a:rPr lang="en-US" sz="1050" dirty="0" err="1">
+                <a:solidFill>
+                  <a:srgbClr val="0D1B5E"/>
+                </a:solidFill>
+                <a:latin typeface="Reddit Sans"/>
+                <a:ea typeface="Reddit Sans"/>
+                <a:cs typeface="Calibri"/>
+              </a:rPr>
+              <a:t>usa</a:t>
+            </a:r>
+            <a:r>
+              <a:rPr lang="en-US" sz="1050" dirty="0">
+                <a:solidFill>
+                  <a:srgbClr val="0D1B5E"/>
+                </a:solidFill>
+                <a:latin typeface="Reddit Sans"/>
+                <a:ea typeface="Reddit Sans"/>
+                <a:cs typeface="Calibri"/>
+              </a:rPr>
+              <a:t> IA</a:t>
             </a:r>
             <a:endParaRPr lang="en-US" sz="1050" dirty="0">
-              <a:latin typeface="Reddit Sans" panose="020B0604020202020204" charset="0"/>
-              <a:ea typeface="Reddit Sans" panose="020B0604020202020204" charset="0"/>
+              <a:latin typeface="Reddit Sans"/>
+              <a:ea typeface="Reddit Sans"/>
+              <a:cs typeface="Calibri"/>
             </a:endParaRPr>
           </a:p>
           <a:p>
@@ -29916,15 +30702,61 @@
                 <a:solidFill>
                   <a:srgbClr val="0D1B5E"/>
                 </a:solidFill>
-                <a:latin typeface="Reddit Sans" panose="020B0604020202020204" charset="0"/>
-                <a:ea typeface="Reddit Sans" panose="020B0604020202020204" charset="0"/>
-                <a:cs typeface="Calibri" pitchFamily="34" charset="-120"/>
-              </a:rPr>
-              <a:t>Aranda: unico competidor local relevante</a:t>
-            </a:r>
-            <a:endParaRPr lang="en-US" sz="1050" dirty="0">
-              <a:latin typeface="Reddit Sans" panose="020B0604020202020204" charset="0"/>
-              <a:ea typeface="Reddit Sans" panose="020B0604020202020204" charset="0"/>
+                <a:latin typeface="Reddit Sans"/>
+                <a:ea typeface="Reddit Sans"/>
+                <a:cs typeface="Calibri"/>
+                <a:hlinkClick r:id="rId3"/>
+              </a:rPr>
+              <a:t>Aranda</a:t>
+            </a:r>
+            <a:r>
+              <a:rPr lang="en-US" sz="1050" dirty="0">
+                <a:solidFill>
+                  <a:srgbClr val="0D1B5E"/>
+                </a:solidFill>
+                <a:latin typeface="Reddit Sans"/>
+                <a:ea typeface="Reddit Sans"/>
+                <a:cs typeface="Calibri"/>
+              </a:rPr>
+              <a:t>: </a:t>
+            </a:r>
+            <a:r>
+              <a:rPr lang="en-US" sz="1050" dirty="0" err="1">
+                <a:solidFill>
+                  <a:srgbClr val="0D1B5E"/>
+                </a:solidFill>
+                <a:latin typeface="Reddit Sans"/>
+                <a:ea typeface="Reddit Sans"/>
+                <a:cs typeface="Calibri"/>
+              </a:rPr>
+              <a:t>Competidor</a:t>
+            </a:r>
+            <a:r>
+              <a:rPr lang="en-US" sz="1050" dirty="0">
+                <a:solidFill>
+                  <a:srgbClr val="0D1B5E"/>
+                </a:solidFill>
+                <a:latin typeface="Reddit Sans"/>
+                <a:ea typeface="Reddit Sans"/>
+                <a:cs typeface="Calibri"/>
+              </a:rPr>
+              <a:t> local </a:t>
+            </a:r>
+            <a:r>
+              <a:rPr lang="en-US" sz="1050" dirty="0" err="1">
+                <a:solidFill>
+                  <a:srgbClr val="0D1B5E"/>
+                </a:solidFill>
+                <a:latin typeface="Reddit Sans"/>
+                <a:ea typeface="Reddit Sans"/>
+                <a:cs typeface="Calibri"/>
+              </a:rPr>
+              <a:t>relevante</a:t>
+            </a:r>
+            <a:endParaRPr lang="en-US" sz="1050" dirty="0" err="1">
+              <a:latin typeface="Reddit Sans"/>
+              <a:ea typeface="Reddit Sans"/>
+              <a:cs typeface="Calibri"/>
             </a:endParaRPr>
           </a:p>
         </p:txBody>
@@ -29969,35 +30801,6 @@
                 <a:cs typeface="Calibri" pitchFamily="34" charset="-120"/>
               </a:rPr>
               <a:t>Fuente: </a:t>
-            </a:r>
-            <a:r>
-              <a:rPr lang="en-US" sz="750" u="sng" dirty="0">
-                <a:solidFill>
-                  <a:srgbClr val="8899BB"/>
-                </a:solidFill>
-                <a:latin typeface="Reddit Sans" panose="020B0604020202020204" charset="0"/>
-                <a:ea typeface="Reddit Sans" panose="020B0604020202020204" charset="0"/>
-                <a:cs typeface="Calibri" pitchFamily="34" charset="-120"/>
-                <a:hlinkClick r:id="rId3">
-                  <a:extLst>
-                    <a:ext uri="{A12FA001-AC4F-418D-AE19-62706E023703}">
-                      <ahyp:hlinkClr xmlns:ahyp="http://schemas.microsoft.com/office/drawing/2018/hyperlinkcolor" val="tx"/>
-                    </a:ext>
-                  </a:extLst>
-                </a:hlinkClick>
-              </a:rPr>
-              <a:t>Mordor Intelligence — ITSM Market</a:t>
-            </a:r>
-            <a:r>
-              <a:rPr lang="en-US" sz="750" dirty="0">
-                <a:solidFill>
-                  <a:srgbClr val="8899BB"/>
-                </a:solidFill>
-                <a:latin typeface="Reddit Sans" panose="020B0604020202020204" charset="0"/>
-                <a:ea typeface="Reddit Sans" panose="020B0604020202020204" charset="0"/>
-                <a:cs typeface="Calibri" pitchFamily="34" charset="-120"/>
-              </a:rPr>
-              <a:t>  ·  </a:t>
             </a:r>
             <a:r>
               <a:rPr lang="en-US" sz="750" u="sng" dirty="0">
@@ -30015,7 +30818,7 @@
                   </a:extLst>
                 </a:hlinkClick>
               </a:rPr>
-              <a:t>Grand View Research — Latin America ITSM</a:t>
+              <a:t>Mordor Intelligence — ITSM Market</a:t>
             </a:r>
             <a:r>
               <a:rPr lang="en-US" sz="750" dirty="0">
@@ -30044,6 +30847,35 @@
                   </a:extLst>
                 </a:hlinkClick>
               </a:rPr>
+              <a:t>Grand View Research — Latin America ITSM</a:t>
+            </a:r>
+            <a:r>
+              <a:rPr lang="en-US" sz="750" dirty="0">
+                <a:solidFill>
+                  <a:srgbClr val="8899BB"/>
+                </a:solidFill>
+                <a:latin typeface="Reddit Sans" panose="020B0604020202020204" charset="0"/>
+                <a:ea typeface="Reddit Sans" panose="020B0604020202020204" charset="0"/>
+                <a:cs typeface="Calibri" pitchFamily="34" charset="-120"/>
+              </a:rPr>
+              <a:t>  ·  </a:t>
+            </a:r>
+            <a:r>
+              <a:rPr lang="en-US" sz="750" u="sng" dirty="0">
+                <a:solidFill>
+                  <a:srgbClr val="8899BB"/>
+                </a:solidFill>
+                <a:latin typeface="Reddit Sans" panose="020B0604020202020204" charset="0"/>
+                <a:ea typeface="Reddit Sans" panose="020B0604020202020204" charset="0"/>
+                <a:cs typeface="Calibri" pitchFamily="34" charset="-120"/>
+                <a:hlinkClick r:id="rId6">
+                  <a:extLst>
+                    <a:ext uri="{A12FA001-AC4F-418D-AE19-62706E023703}">
+                      <ahyp:hlinkClr xmlns:ahyp="http://schemas.microsoft.com/office/drawing/2018/hyperlinkcolor" val="tx"/>
+                    </a:ext>
+                  </a:extLst>
+                </a:hlinkClick>
+              </a:rPr>
               <a:t>Superfinanciera Colombia — Circular 007</a:t>
             </a:r>
             <a:endParaRPr lang="en-US" sz="750" dirty="0">
@@ -30101,6 +30933,37 @@
           </a:p>
         </p:txBody>
       </p:sp>
+      <p:pic>
+        <p:nvPicPr>
+          <p:cNvPr id="21" name="Imagen 20" descr="Aranda Software">
+            <a:extLst>
+              <a:ext uri="{FF2B5EF4-FFF2-40B4-BE49-F238E27FC236}">
+                <a16:creationId xmlns:a16="http://schemas.microsoft.com/office/drawing/2014/main" id="{6C519858-D38D-E4BD-9A0F-0664A49223D2}"/>
+              </a:ext>
+            </a:extLst>
+          </p:cNvPr>
+          <p:cNvPicPr>
+            <a:picLocks noChangeAspect="1"/>
+          </p:cNvPicPr>
+          <p:nvPr/>
+        </p:nvPicPr>
+        <p:blipFill>
+          <a:blip r:embed="rId7"/>
+          <a:srcRect r="5226"/>
+          <a:stretch>
+            <a:fillRect/>
+          </a:stretch>
+        </p:blipFill>
+        <p:spPr>
+          <a:xfrm>
+            <a:off x="8148637" y="3936546"/>
+            <a:ext cx="548369" cy="242208"/>
+          </a:xfrm>
+          <a:prstGeom prst="rect">
+            <a:avLst/>
+          </a:prstGeom>
+        </p:spPr>
+      </p:pic>
     </p:spTree>
     <p:extLst>
       <p:ext uri="{BB962C8B-B14F-4D97-AF65-F5344CB8AC3E}">
@@ -30177,7 +31040,7 @@
         <p:spPr>
           <a:xfrm>
             <a:off x="436512" y="947699"/>
-            <a:ext cx="3931920" cy="3000057"/>
+            <a:ext cx="3931920" cy="1950000"/>
           </a:xfrm>
           <a:prstGeom prst="roundRect">
             <a:avLst>
@@ -30185,7 +31048,10 @@
             </a:avLst>
           </a:prstGeom>
           <a:solidFill>
-            <a:srgbClr val="FDECEA"/>
+            <a:schemeClr val="accent6">
+              <a:lumMod val="20000"/>
+              <a:lumOff val="80000"/>
+            </a:schemeClr>
           </a:solidFill>
           <a:ln w="12700">
             <a:solidFill>
@@ -30257,7 +31123,7 @@
         </p:nvSpPr>
         <p:spPr>
           <a:xfrm>
-            <a:off x="505092" y="1331747"/>
+            <a:off x="505092" y="1300000"/>
             <a:ext cx="3694176" cy="384048"/>
           </a:xfrm>
           <a:prstGeom prst="rect">
@@ -30305,7 +31171,7 @@
         </p:nvSpPr>
         <p:spPr>
           <a:xfrm>
-            <a:off x="505092" y="1752371"/>
+            <a:off x="505092" y="1560000"/>
             <a:ext cx="3694176" cy="384048"/>
           </a:xfrm>
           <a:prstGeom prst="rect">
@@ -30353,7 +31219,7 @@
         </p:nvSpPr>
         <p:spPr>
           <a:xfrm>
-            <a:off x="505092" y="2172995"/>
+            <a:off x="505092" y="1820000"/>
             <a:ext cx="3694176" cy="384048"/>
           </a:xfrm>
           <a:prstGeom prst="rect">
@@ -30401,7 +31267,7 @@
         </p:nvSpPr>
         <p:spPr>
           <a:xfrm>
-            <a:off x="505092" y="2593619"/>
+            <a:off x="505092" y="2080000"/>
             <a:ext cx="3694176" cy="384048"/>
           </a:xfrm>
           <a:prstGeom prst="rect">
@@ -30426,7 +31292,51 @@
                 <a:ea typeface="Reddit Sans" panose="020B0604020202020204" charset="0"/>
                 <a:cs typeface="Calibri" pitchFamily="34" charset="-120"/>
               </a:rPr>
-              <a:t>▪  "Quien tiene mas modulos?"</a:t>
+              <a:t>▪  </a:t>
+            </a:r>
+            <a:r>
+              <a:rPr lang="en-US" sz="1100">
+                <a:solidFill>
+                  <a:srgbClr val="1A1A2E"/>
+                </a:solidFill>
+                <a:latin typeface="Reddit Sans" panose="020B0604020202020204" charset="0"/>
+                <a:ea typeface="Reddit Sans" panose="020B0604020202020204" charset="0"/>
+                <a:cs typeface="Calibri" pitchFamily="34" charset="-120"/>
+              </a:rPr>
+              <a:t>Criterio de compra: "¿quién </a:t>
+            </a:r>
+            <a:r>
+              <a:rPr lang="en-US" sz="1100" dirty="0">
+                <a:solidFill>
+                  <a:srgbClr val="1A1A2E"/>
+                </a:solidFill>
+                <a:latin typeface="Reddit Sans" panose="020B0604020202020204" charset="0"/>
+                <a:ea typeface="Reddit Sans" panose="020B0604020202020204" charset="0"/>
+                <a:cs typeface="Calibri" pitchFamily="34" charset="-120"/>
+              </a:rPr>
+              <a:t>tiene </a:t>
+            </a:r>
+            <a:r>
+              <a:rPr lang="en-US" sz="1100">
+                <a:solidFill>
+                  <a:srgbClr val="1A1A2E"/>
+                </a:solidFill>
+                <a:latin typeface="Reddit Sans" panose="020B0604020202020204" charset="0"/>
+                <a:ea typeface="Reddit Sans" panose="020B0604020202020204" charset="0"/>
+                <a:cs typeface="Calibri" pitchFamily="34" charset="-120"/>
+              </a:rPr>
+              <a:t>más módulos</a:t>
+            </a:r>
+            <a:r>
+              <a:rPr lang="en-US" sz="1100" dirty="0">
+                <a:solidFill>
+                  <a:srgbClr val="1A1A2E"/>
+                </a:solidFill>
+                <a:latin typeface="Reddit Sans" panose="020B0604020202020204" charset="0"/>
+                <a:ea typeface="Reddit Sans" panose="020B0604020202020204" charset="0"/>
+                <a:cs typeface="Calibri" pitchFamily="34" charset="-120"/>
+              </a:rPr>
+              <a:t>?"</a:t>
             </a:r>
             <a:endParaRPr lang="en-US" sz="1100" dirty="0">
               <a:latin typeface="Reddit Sans" panose="020B0604020202020204" charset="0"/>
@@ -30449,7 +31359,7 @@
         </p:nvSpPr>
         <p:spPr>
           <a:xfrm>
-            <a:off x="505092" y="3014243"/>
+            <a:off x="505092" y="2340000"/>
             <a:ext cx="3694176" cy="566928"/>
           </a:xfrm>
           <a:prstGeom prst="rect">
@@ -30517,18 +31427,18 @@
         </p:nvSpPr>
         <p:spPr>
           <a:xfrm>
-            <a:off x="4382148" y="2081555"/>
+            <a:off x="4382148" y="1648000"/>
             <a:ext cx="640080" cy="548640"/>
           </a:xfrm>
           <a:prstGeom prst="rightArrow">
             <a:avLst/>
           </a:prstGeom>
           <a:solidFill>
-            <a:srgbClr val="D4A017"/>
+            <a:schemeClr val="accent1"/>
           </a:solidFill>
           <a:ln w="12700">
             <a:solidFill>
-              <a:srgbClr val="D4A017"/>
+              <a:srgbClr val="4472C4"/>
             </a:solidFill>
             <a:prstDash val="solid"/>
           </a:ln>
@@ -30549,7 +31459,7 @@
         <p:spPr>
           <a:xfrm>
             <a:off x="5049660" y="947699"/>
-            <a:ext cx="3840480" cy="3000057"/>
+            <a:ext cx="3840480" cy="1950000"/>
           </a:xfrm>
           <a:prstGeom prst="roundRect">
             <a:avLst>
@@ -30629,7 +31539,7 @@
         </p:nvSpPr>
         <p:spPr>
           <a:xfrm>
-            <a:off x="5168532" y="1331747"/>
+            <a:off x="5168532" y="1280000"/>
             <a:ext cx="3630168" cy="320040"/>
           </a:xfrm>
           <a:prstGeom prst="rect">
@@ -30677,7 +31587,7 @@
         </p:nvSpPr>
         <p:spPr>
           <a:xfrm>
-            <a:off x="5168532" y="1679219"/>
+            <a:off x="5168532" y="1505000"/>
             <a:ext cx="3630168" cy="320040"/>
           </a:xfrm>
           <a:prstGeom prst="rect">
@@ -30702,7 +31612,40 @@
                 <a:ea typeface="Reddit Sans" panose="020B0604020202020204" charset="0"/>
                 <a:cs typeface="Calibri" pitchFamily="34" charset="-120"/>
               </a:rPr>
-              <a:t>▪  9 capacidades criticas de IA evaluadas</a:t>
+              <a:t>▪  9 capacidades </a:t>
+            </a:r>
+            <a:r>
+              <a:rPr lang="en-US" sz="1100">
+                <a:solidFill>
+                  <a:srgbClr val="1A1A2E"/>
+                </a:solidFill>
+                <a:latin typeface="Reddit Sans" panose="020B0604020202020204" charset="0"/>
+                <a:ea typeface="Reddit Sans" panose="020B0604020202020204" charset="0"/>
+                <a:cs typeface="Calibri" pitchFamily="34" charset="-120"/>
+              </a:rPr>
+              <a:t>críticas </a:t>
+            </a:r>
+            <a:r>
+              <a:rPr lang="en-US" sz="1100" dirty="0">
+                <a:solidFill>
+                  <a:srgbClr val="1A1A2E"/>
+                </a:solidFill>
+                <a:latin typeface="Reddit Sans" panose="020B0604020202020204" charset="0"/>
+                <a:ea typeface="Reddit Sans" panose="020B0604020202020204" charset="0"/>
+                <a:cs typeface="Calibri" pitchFamily="34" charset="-120"/>
+              </a:rPr>
+              <a:t>de IA evaluadas</a:t>
+            </a:r>
+            <a:r>
+              <a:rPr lang="en-US" sz="1100">
+                <a:solidFill>
+                  <a:srgbClr val="1A1A2E"/>
+                </a:solidFill>
+                <a:latin typeface="Reddit Sans" panose="020B0604020202020204" charset="0"/>
+                <a:ea typeface="Reddit Sans" panose="020B0604020202020204" charset="0"/>
+                <a:cs typeface="Calibri" pitchFamily="34" charset="-120"/>
+              </a:rPr>
+              <a:t> (abajo)</a:t>
             </a:r>
             <a:endParaRPr lang="en-US" sz="1100" dirty="0">
               <a:latin typeface="Reddit Sans" panose="020B0604020202020204" charset="0"/>
@@ -30725,7 +31668,7 @@
         </p:nvSpPr>
         <p:spPr>
           <a:xfrm>
-            <a:off x="5168532" y="2026691"/>
+            <a:off x="5168532" y="1730000"/>
             <a:ext cx="3630168" cy="320040"/>
           </a:xfrm>
           <a:prstGeom prst="rect">
@@ -30735,7 +31678,7 @@
           <a:ln/>
         </p:spPr>
         <p:txBody>
-          <a:bodyPr wrap="square" rtlCol="0" anchor="ctr"/>
+          <a:bodyPr wrap="square" lIns="91440" tIns="45720" rIns="91440" bIns="45720" rtlCol="0" anchor="ctr"/>
           <a:lstStyle/>
           <a:p>
             <a:pPr marL="0" indent="0">
@@ -30746,15 +31689,49 @@
                 <a:solidFill>
                   <a:srgbClr val="1A1A2E"/>
                 </a:solidFill>
-                <a:latin typeface="Reddit Sans" panose="020B0604020202020204" charset="0"/>
-                <a:ea typeface="Reddit Sans" panose="020B0604020202020204" charset="0"/>
-                <a:cs typeface="Calibri" pitchFamily="34" charset="-120"/>
-              </a:rPr>
-              <a:t>▪  Solo 1 Lider en 2025: ServiceNow</a:t>
-            </a:r>
-            <a:endParaRPr lang="en-US" sz="1100" dirty="0">
-              <a:latin typeface="Reddit Sans" panose="020B0604020202020204" charset="0"/>
-              <a:ea typeface="Reddit Sans" panose="020B0604020202020204" charset="0"/>
+                <a:latin typeface="Reddit Sans"/>
+                <a:ea typeface="Reddit Sans"/>
+                <a:cs typeface="Calibri"/>
+              </a:rPr>
+              <a:t>▪  Solo 1 Lider </a:t>
+            </a:r>
+            <a:r>
+              <a:rPr lang="en-US" sz="1100" dirty="0" err="1">
+                <a:solidFill>
+                  <a:srgbClr val="1A1A2E"/>
+                </a:solidFill>
+                <a:latin typeface="Reddit Sans"/>
+                <a:ea typeface="Reddit Sans"/>
+                <a:cs typeface="Calibri"/>
+              </a:rPr>
+              <a:t>en</a:t>
+            </a:r>
+            <a:r>
+              <a:rPr lang="en-US" sz="1100" dirty="0">
+                <a:solidFill>
+                  <a:srgbClr val="1A1A2E"/>
+                </a:solidFill>
+                <a:latin typeface="Reddit Sans"/>
+                <a:ea typeface="Reddit Sans"/>
+                <a:cs typeface="Calibri"/>
+              </a:rPr>
+              <a:t> 2025: </a:t>
+            </a:r>
+            <a:r>
+              <a:rPr lang="en-US" sz="1100" b="1" dirty="0">
+                <a:solidFill>
+                  <a:srgbClr val="1A1A2E"/>
+                </a:solidFill>
+                <a:latin typeface="Reddit Sans"/>
+                <a:ea typeface="Reddit Sans"/>
+                <a:cs typeface="Calibri"/>
+              </a:rPr>
+              <a:t>ServiceNow</a:t>
+            </a:r>
+            <a:endParaRPr lang="en-US" sz="1100" b="1">
+              <a:latin typeface="Reddit Sans"/>
+              <a:ea typeface="Reddit Sans"/>
+              <a:cs typeface="Calibri"/>
             </a:endParaRPr>
           </a:p>
         </p:txBody>
@@ -30773,7 +31750,7 @@
         </p:nvSpPr>
         <p:spPr>
           <a:xfrm>
-            <a:off x="5168532" y="2374163"/>
+            <a:off x="5168532" y="1955000"/>
             <a:ext cx="3630168" cy="320040"/>
           </a:xfrm>
           <a:prstGeom prst="rect">
@@ -30821,7 +31798,7 @@
         </p:nvSpPr>
         <p:spPr>
           <a:xfrm>
-            <a:off x="5168532" y="2721635"/>
+            <a:off x="5168532" y="2180000"/>
             <a:ext cx="3630168" cy="320040"/>
           </a:xfrm>
           <a:prstGeom prst="rect">
@@ -30869,7 +31846,7 @@
         </p:nvSpPr>
         <p:spPr>
           <a:xfrm>
-            <a:off x="5168532" y="3069107"/>
+            <a:off x="5168532" y="2405000"/>
             <a:ext cx="3630168" cy="502920"/>
           </a:xfrm>
           <a:prstGeom prst="rect">
@@ -30879,7 +31856,7 @@
           <a:ln/>
         </p:spPr>
         <p:txBody>
-          <a:bodyPr wrap="square" rtlCol="0" anchor="ctr"/>
+          <a:bodyPr wrap="square" lIns="91440" tIns="45720" rIns="91440" bIns="45720" rtlCol="0" anchor="ctr"/>
           <a:lstStyle/>
           <a:p>
             <a:pPr marL="0" indent="0">
@@ -30890,15 +31867,60 @@
                 <a:solidFill>
                   <a:srgbClr val="1A1A2E"/>
                 </a:solidFill>
-                <a:latin typeface="Reddit Sans" panose="020B0604020202020204" charset="0"/>
-                <a:ea typeface="Reddit Sans" panose="020B0604020202020204" charset="0"/>
-                <a:cs typeface="Calibri" pitchFamily="34" charset="-120"/>
-              </a:rPr>
-              <a:t>▪  La plataforma es insumo — el framework</a:t>
+                <a:latin typeface="Reddit Sans"/>
+                <a:ea typeface="Reddit Sans"/>
+                <a:cs typeface="Calibri"/>
+              </a:rPr>
+              <a:t>▪  La </a:t>
+            </a:r>
+            <a:r>
+              <a:rPr lang="en-US" sz="1100" dirty="0" err="1">
+                <a:solidFill>
+                  <a:srgbClr val="1A1A2E"/>
+                </a:solidFill>
+                <a:latin typeface="Reddit Sans"/>
+                <a:ea typeface="Reddit Sans"/>
+                <a:cs typeface="Calibri"/>
+              </a:rPr>
+              <a:t>plataforma</a:t>
+            </a:r>
+            <a:r>
+              <a:rPr lang="en-US" sz="1100" dirty="0">
+                <a:solidFill>
+                  <a:srgbClr val="1A1A2E"/>
+                </a:solidFill>
+                <a:latin typeface="Reddit Sans"/>
+                <a:ea typeface="Reddit Sans"/>
+                <a:cs typeface="Calibri"/>
+              </a:rPr>
+              <a:t> es </a:t>
+            </a:r>
+            <a:r>
+              <a:rPr lang="en-US" sz="1100" dirty="0" err="1">
+                <a:solidFill>
+                  <a:srgbClr val="1A1A2E"/>
+                </a:solidFill>
+                <a:latin typeface="Reddit Sans"/>
+                <a:ea typeface="Reddit Sans"/>
+                <a:cs typeface="Calibri"/>
+              </a:rPr>
+              <a:t>insumo</a:t>
+            </a:r>
+            <a:r>
+              <a:rPr lang="en-US" sz="1100" dirty="0">
+                <a:solidFill>
+                  <a:srgbClr val="1A1A2E"/>
+                </a:solidFill>
+                <a:latin typeface="Reddit Sans"/>
+                <a:ea typeface="Reddit Sans"/>
+                <a:cs typeface="Calibri"/>
+              </a:rPr>
+              <a:t>, el framework</a:t>
             </a:r>
             <a:endParaRPr lang="en-US" sz="1100" dirty="0">
-              <a:latin typeface="Reddit Sans" panose="020B0604020202020204" charset="0"/>
-              <a:ea typeface="Reddit Sans" panose="020B0604020202020204" charset="0"/>
+              <a:latin typeface="Reddit Sans"/>
+              <a:ea typeface="Reddit Sans"/>
+              <a:cs typeface="Calibri"/>
             </a:endParaRPr>
           </a:p>
           <a:p>
@@ -30910,15 +31932,49 @@
                 <a:solidFill>
                   <a:srgbClr val="1A1A2E"/>
                 </a:solidFill>
-                <a:latin typeface="Reddit Sans" panose="020B0604020202020204" charset="0"/>
-                <a:ea typeface="Reddit Sans" panose="020B0604020202020204" charset="0"/>
-                <a:cs typeface="Calibri" pitchFamily="34" charset="-120"/>
-              </a:rPr>
-              <a:t>de IA y gobierno es el producto</a:t>
-            </a:r>
-            <a:endParaRPr lang="en-US" sz="1100" dirty="0">
-              <a:latin typeface="Reddit Sans" panose="020B0604020202020204" charset="0"/>
-              <a:ea typeface="Reddit Sans" panose="020B0604020202020204" charset="0"/>
+                <a:latin typeface="Reddit Sans"/>
+                <a:ea typeface="Reddit Sans"/>
+                <a:cs typeface="Calibri"/>
+              </a:rPr>
+              <a:t>de IA y </a:t>
+            </a:r>
+            <a:r>
+              <a:rPr lang="en-US" sz="1100" dirty="0" err="1">
+                <a:solidFill>
+                  <a:srgbClr val="1A1A2E"/>
+                </a:solidFill>
+                <a:latin typeface="Reddit Sans"/>
+                <a:ea typeface="Reddit Sans"/>
+                <a:cs typeface="Calibri"/>
+              </a:rPr>
+              <a:t>gobierno</a:t>
+            </a:r>
+            <a:r>
+              <a:rPr lang="en-US" sz="1100" dirty="0">
+                <a:solidFill>
+                  <a:srgbClr val="1A1A2E"/>
+                </a:solidFill>
+                <a:latin typeface="Reddit Sans"/>
+                <a:ea typeface="Reddit Sans"/>
+                <a:cs typeface="Calibri"/>
+              </a:rPr>
+              <a:t> es el </a:t>
+            </a:r>
+            <a:r>
+              <a:rPr lang="en-US" sz="1100" dirty="0" err="1">
+                <a:solidFill>
+                  <a:srgbClr val="1A1A2E"/>
+                </a:solidFill>
+                <a:latin typeface="Reddit Sans"/>
+                <a:ea typeface="Reddit Sans"/>
+                <a:cs typeface="Calibri"/>
+              </a:rPr>
+              <a:t>producto</a:t>
+            </a:r>
+            <a:endParaRPr lang="en-US" sz="1100" dirty="0" err="1">
+              <a:latin typeface="Reddit Sans"/>
+              <a:ea typeface="Reddit Sans"/>
+              <a:cs typeface="Calibri"/>
             </a:endParaRPr>
           </a:p>
         </p:txBody>
@@ -30937,7 +31993,7 @@
         </p:nvSpPr>
         <p:spPr>
           <a:xfrm>
-            <a:off x="386220" y="4198609"/>
+            <a:off x="386220" y="4263923"/>
             <a:ext cx="8503920" cy="274320"/>
           </a:xfrm>
           <a:prstGeom prst="rect">
@@ -30954,7 +32010,7 @@
           </a:ln>
         </p:spPr>
         <p:txBody>
-          <a:bodyPr/>
+          <a:bodyPr lIns="91440" tIns="45720" rIns="91440" bIns="45720" anchor="t"/>
           <a:lstStyle/>
           <a:p>
             <a:pPr marL="0" indent="0" algn="ctr">
@@ -30965,9 +32021,9 @@
                 <a:solidFill>
                   <a:srgbClr val="FFFFFF"/>
                 </a:solidFill>
-                <a:latin typeface="Reddit Sans" panose="020B0604020202020204" charset="0"/>
-                <a:ea typeface="Reddit Sans" panose="020B0604020202020204" charset="0"/>
-                <a:cs typeface="Calibri" pitchFamily="34" charset="-120"/>
+                <a:latin typeface="Reddit Sans"/>
+                <a:ea typeface="Reddit Sans"/>
+                <a:cs typeface="Calibri"/>
               </a:rPr>
               <a:t>Para </a:t>
             </a:r>
@@ -30976,9 +32032,9 @@
                 <a:solidFill>
                   <a:srgbClr val="FFFFFF"/>
                 </a:solidFill>
-                <a:latin typeface="Reddit Sans" panose="020B0604020202020204" charset="0"/>
-                <a:ea typeface="Reddit Sans" panose="020B0604020202020204" charset="0"/>
-                <a:cs typeface="Calibri" pitchFamily="34" charset="-120"/>
+                <a:latin typeface="Reddit Sans"/>
+                <a:ea typeface="Reddit Sans"/>
+                <a:cs typeface="Calibri"/>
               </a:rPr>
               <a:t>PersonalSoft</a:t>
             </a:r>
@@ -30987,20 +32043,20 @@
                 <a:solidFill>
                   <a:srgbClr val="FFFFFF"/>
                 </a:solidFill>
-                <a:latin typeface="Reddit Sans" panose="020B0604020202020204" charset="0"/>
-                <a:ea typeface="Reddit Sans" panose="020B0604020202020204" charset="0"/>
-                <a:cs typeface="Calibri" pitchFamily="34" charset="-120"/>
-              </a:rPr>
-              <a:t>: el </a:t>
+                <a:latin typeface="Reddit Sans"/>
+                <a:ea typeface="Reddit Sans"/>
+                <a:cs typeface="Calibri"/>
+              </a:rPr>
+              <a:t>: El </a:t>
             </a:r>
             <a:r>
               <a:rPr lang="en-US" sz="900" b="1" dirty="0" err="1">
                 <a:solidFill>
                   <a:srgbClr val="FFFFFF"/>
                 </a:solidFill>
-                <a:latin typeface="Reddit Sans" panose="020B0604020202020204" charset="0"/>
-                <a:ea typeface="Reddit Sans" panose="020B0604020202020204" charset="0"/>
-                <a:cs typeface="Calibri" pitchFamily="34" charset="-120"/>
+                <a:latin typeface="Reddit Sans"/>
+                <a:ea typeface="Reddit Sans"/>
+                <a:cs typeface="Calibri"/>
               </a:rPr>
               <a:t>diferenciador</a:t>
             </a:r>
@@ -31009,9 +32065,9 @@
                 <a:solidFill>
                   <a:srgbClr val="FFFFFF"/>
                 </a:solidFill>
-                <a:latin typeface="Reddit Sans" panose="020B0604020202020204" charset="0"/>
-                <a:ea typeface="Reddit Sans" panose="020B0604020202020204" charset="0"/>
-                <a:cs typeface="Calibri" pitchFamily="34" charset="-120"/>
+                <a:latin typeface="Reddit Sans"/>
+                <a:ea typeface="Reddit Sans"/>
+                <a:cs typeface="Calibri"/>
               </a:rPr>
               <a:t> no es la Plataforma, es el framework de </a:t>
             </a:r>
@@ -31020,9 +32076,9 @@
                 <a:solidFill>
                   <a:srgbClr val="FFFFFF"/>
                 </a:solidFill>
-                <a:latin typeface="Reddit Sans" panose="020B0604020202020204" charset="0"/>
-                <a:ea typeface="Reddit Sans" panose="020B0604020202020204" charset="0"/>
-                <a:cs typeface="Calibri" pitchFamily="34" charset="-120"/>
+                <a:latin typeface="Reddit Sans"/>
+                <a:ea typeface="Reddit Sans"/>
+                <a:cs typeface="Calibri"/>
               </a:rPr>
               <a:t>madurez</a:t>
             </a:r>
@@ -31031,9 +32087,9 @@
                 <a:solidFill>
                   <a:srgbClr val="FFFFFF"/>
                 </a:solidFill>
-                <a:latin typeface="Reddit Sans" panose="020B0604020202020204" charset="0"/>
-                <a:ea typeface="Reddit Sans" panose="020B0604020202020204" charset="0"/>
-                <a:cs typeface="Calibri" pitchFamily="34" charset="-120"/>
+                <a:latin typeface="Reddit Sans"/>
+                <a:ea typeface="Reddit Sans"/>
+                <a:cs typeface="Calibri"/>
               </a:rPr>
               <a:t> y </a:t>
             </a:r>
@@ -31042,9 +32098,9 @@
                 <a:solidFill>
                   <a:srgbClr val="FFFFFF"/>
                 </a:solidFill>
-                <a:latin typeface="Reddit Sans" panose="020B0604020202020204" charset="0"/>
-                <a:ea typeface="Reddit Sans" panose="020B0604020202020204" charset="0"/>
-                <a:cs typeface="Calibri" pitchFamily="34" charset="-120"/>
+                <a:latin typeface="Reddit Sans"/>
+                <a:ea typeface="Reddit Sans"/>
+                <a:cs typeface="Calibri"/>
               </a:rPr>
               <a:t>gobierno</a:t>
             </a:r>
@@ -31053,9 +32109,9 @@
                 <a:solidFill>
                   <a:srgbClr val="FFFFFF"/>
                 </a:solidFill>
-                <a:latin typeface="Reddit Sans" panose="020B0604020202020204" charset="0"/>
-                <a:ea typeface="Reddit Sans" panose="020B0604020202020204" charset="0"/>
-                <a:cs typeface="Calibri" pitchFamily="34" charset="-120"/>
+                <a:latin typeface="Reddit Sans"/>
+                <a:ea typeface="Reddit Sans"/>
+                <a:cs typeface="Calibri"/>
               </a:rPr>
               <a:t> </a:t>
             </a:r>
@@ -31064,9 +32120,9 @@
                 <a:solidFill>
                   <a:srgbClr val="FFFFFF"/>
                 </a:solidFill>
-                <a:latin typeface="Reddit Sans" panose="020B0604020202020204" charset="0"/>
-                <a:ea typeface="Reddit Sans" panose="020B0604020202020204" charset="0"/>
-                <a:cs typeface="Calibri" pitchFamily="34" charset="-120"/>
+                <a:latin typeface="Reddit Sans"/>
+                <a:ea typeface="Reddit Sans"/>
+                <a:cs typeface="Calibri"/>
               </a:rPr>
               <a:t>que</a:t>
             </a:r>
@@ -31075,9 +32131,9 @@
                 <a:solidFill>
                   <a:srgbClr val="FFFFFF"/>
                 </a:solidFill>
-                <a:latin typeface="Reddit Sans" panose="020B0604020202020204" charset="0"/>
-                <a:ea typeface="Reddit Sans" panose="020B0604020202020204" charset="0"/>
-                <a:cs typeface="Calibri" pitchFamily="34" charset="-120"/>
+                <a:latin typeface="Reddit Sans"/>
+                <a:ea typeface="Reddit Sans"/>
+                <a:cs typeface="Calibri"/>
               </a:rPr>
               <a:t> </a:t>
             </a:r>
@@ -31086,9 +32142,9 @@
                 <a:solidFill>
                   <a:srgbClr val="FFFFFF"/>
                 </a:solidFill>
-                <a:latin typeface="Reddit Sans" panose="020B0604020202020204" charset="0"/>
-                <a:ea typeface="Reddit Sans" panose="020B0604020202020204" charset="0"/>
-                <a:cs typeface="Calibri" pitchFamily="34" charset="-120"/>
+                <a:latin typeface="Reddit Sans"/>
+                <a:ea typeface="Reddit Sans"/>
+                <a:cs typeface="Calibri"/>
               </a:rPr>
               <a:t>aplicamos</a:t>
             </a:r>
@@ -31097,9 +32153,9 @@
                 <a:solidFill>
                   <a:srgbClr val="FFFFFF"/>
                 </a:solidFill>
-                <a:latin typeface="Reddit Sans" panose="020B0604020202020204" charset="0"/>
-                <a:ea typeface="Reddit Sans" panose="020B0604020202020204" charset="0"/>
-                <a:cs typeface="Calibri" pitchFamily="34" charset="-120"/>
+                <a:latin typeface="Reddit Sans"/>
+                <a:ea typeface="Reddit Sans"/>
+                <a:cs typeface="Calibri"/>
               </a:rPr>
               <a:t> </a:t>
             </a:r>
@@ -31108,9 +32164,9 @@
                 <a:solidFill>
                   <a:srgbClr val="FFFFFF"/>
                 </a:solidFill>
-                <a:latin typeface="Reddit Sans" panose="020B0604020202020204" charset="0"/>
-                <a:ea typeface="Reddit Sans" panose="020B0604020202020204" charset="0"/>
-                <a:cs typeface="Calibri" pitchFamily="34" charset="-120"/>
+                <a:latin typeface="Reddit Sans"/>
+                <a:ea typeface="Reddit Sans"/>
+                <a:cs typeface="Calibri"/>
               </a:rPr>
               <a:t>sobre</a:t>
             </a:r>
@@ -31119,9 +32175,9 @@
                 <a:solidFill>
                   <a:srgbClr val="FFFFFF"/>
                 </a:solidFill>
-                <a:latin typeface="Reddit Sans" panose="020B0604020202020204" charset="0"/>
-                <a:ea typeface="Reddit Sans" panose="020B0604020202020204" charset="0"/>
-                <a:cs typeface="Calibri" pitchFamily="34" charset="-120"/>
+                <a:latin typeface="Reddit Sans"/>
+                <a:ea typeface="Reddit Sans"/>
+                <a:cs typeface="Calibri"/>
               </a:rPr>
               <a:t> </a:t>
             </a:r>
@@ -31130,15 +32186,16 @@
                 <a:solidFill>
                   <a:srgbClr val="FFFFFF"/>
                 </a:solidFill>
-                <a:latin typeface="Reddit Sans" panose="020B0604020202020204" charset="0"/>
-                <a:ea typeface="Reddit Sans" panose="020B0604020202020204" charset="0"/>
-                <a:cs typeface="Calibri" pitchFamily="34" charset="-120"/>
+                <a:latin typeface="Reddit Sans"/>
+                <a:ea typeface="Reddit Sans"/>
+                <a:cs typeface="Calibri"/>
               </a:rPr>
               <a:t>ella</a:t>
             </a:r>
             <a:endParaRPr lang="en-US" sz="900" dirty="0">
-              <a:latin typeface="Reddit Sans" panose="020B0604020202020204" charset="0"/>
-              <a:ea typeface="Reddit Sans" panose="020B0604020202020204" charset="0"/>
+              <a:latin typeface="Reddit Sans"/>
+              <a:ea typeface="Reddit Sans"/>
+              <a:cs typeface="Calibri"/>
             </a:endParaRPr>
           </a:p>
         </p:txBody>
@@ -31183,35 +32240,6 @@
                 <a:cs typeface="Calibri" pitchFamily="34" charset="-120"/>
               </a:rPr>
               <a:t>Fuente: </a:t>
-            </a:r>
-            <a:r>
-              <a:rPr lang="en-US" sz="750" u="sng" dirty="0">
-                <a:solidFill>
-                  <a:srgbClr val="8899BB"/>
-                </a:solidFill>
-                <a:latin typeface="Reddit Sans" panose="020B0604020202020204" charset="0"/>
-                <a:ea typeface="Reddit Sans" panose="020B0604020202020204" charset="0"/>
-                <a:cs typeface="Calibri" pitchFamily="34" charset="-120"/>
-                <a:hlinkClick r:id="rId2">
-                  <a:extLst>
-                    <a:ext uri="{A12FA001-AC4F-418D-AE19-62706E023703}">
-                      <ahyp:hlinkClr xmlns:ahyp="http://schemas.microsoft.com/office/drawing/2018/hyperlinkcolor" val="tx"/>
-                    </a:ext>
-                  </a:extLst>
-                </a:hlinkClick>
-              </a:rPr>
-              <a:t>Gartner MQ AI Applications in ITSM 2025</a:t>
-            </a:r>
-            <a:r>
-              <a:rPr lang="en-US" sz="750" dirty="0">
-                <a:solidFill>
-                  <a:srgbClr val="8899BB"/>
-                </a:solidFill>
-                <a:latin typeface="Reddit Sans" panose="020B0604020202020204" charset="0"/>
-                <a:ea typeface="Reddit Sans" panose="020B0604020202020204" charset="0"/>
-                <a:cs typeface="Calibri" pitchFamily="34" charset="-120"/>
-              </a:rPr>
-              <a:t>  ·  </a:t>
             </a:r>
             <a:r>
               <a:rPr lang="en-US" sz="750" u="sng" dirty="0">
@@ -31229,6 +32257,35 @@
                   </a:extLst>
                 </a:hlinkClick>
               </a:rPr>
+              <a:t>Gartner MQ AI Applications in ITSM 2025</a:t>
+            </a:r>
+            <a:r>
+              <a:rPr lang="en-US" sz="750" dirty="0">
+                <a:solidFill>
+                  <a:srgbClr val="8899BB"/>
+                </a:solidFill>
+                <a:latin typeface="Reddit Sans" panose="020B0604020202020204" charset="0"/>
+                <a:ea typeface="Reddit Sans" panose="020B0604020202020204" charset="0"/>
+                <a:cs typeface="Calibri" pitchFamily="34" charset="-120"/>
+              </a:rPr>
+              <a:t>  ·  </a:t>
+            </a:r>
+            <a:r>
+              <a:rPr lang="en-US" sz="750" u="sng" dirty="0">
+                <a:solidFill>
+                  <a:srgbClr val="8899BB"/>
+                </a:solidFill>
+                <a:latin typeface="Reddit Sans" panose="020B0604020202020204" charset="0"/>
+                <a:ea typeface="Reddit Sans" panose="020B0604020202020204" charset="0"/>
+                <a:cs typeface="Calibri" pitchFamily="34" charset="-120"/>
+                <a:hlinkClick r:id="rId4">
+                  <a:extLst>
+                    <a:ext uri="{A12FA001-AC4F-418D-AE19-62706E023703}">
+                      <ahyp:hlinkClr xmlns:ahyp="http://schemas.microsoft.com/office/drawing/2018/hyperlinkcolor" val="tx"/>
+                    </a:ext>
+                  </a:extLst>
+                </a:hlinkClick>
+              </a:rPr>
               <a:t>Gartner — Retire ITSM MQ 2023</a:t>
             </a:r>
             <a:endParaRPr lang="en-US" sz="750" dirty="0">
@@ -31262,27 +32319,757 @@
           <a:ln/>
         </p:spPr>
         <p:txBody>
+          <a:bodyPr wrap="square" lIns="91440" tIns="45720" rIns="91440" bIns="45720" rtlCol="0" anchor="ctr"/>
+          <a:lstStyle/>
+          <a:p>
+            <a:r>
+              <a:rPr lang="en-US" sz="1100" dirty="0">
+                <a:solidFill>
+                  <a:srgbClr val="AABBDD"/>
+                </a:solidFill>
+                <a:latin typeface="Reddit Sans"/>
+                <a:ea typeface="Reddit Sans"/>
+                <a:cs typeface="Calibri"/>
+              </a:rPr>
+              <a:t>El mercado </a:t>
+            </a:r>
+            <a:r>
+              <a:rPr lang="en-US" sz="1100" dirty="0" err="1">
+                <a:solidFill>
+                  <a:srgbClr val="AABBDD"/>
+                </a:solidFill>
+                <a:latin typeface="Reddit Sans"/>
+                <a:ea typeface="Reddit Sans"/>
+                <a:cs typeface="Calibri"/>
+              </a:rPr>
+              <a:t>ya</a:t>
+            </a:r>
+            <a:r>
+              <a:rPr lang="en-US" sz="1100" dirty="0">
+                <a:solidFill>
+                  <a:srgbClr val="AABBDD"/>
+                </a:solidFill>
+                <a:latin typeface="Reddit Sans"/>
+                <a:ea typeface="Reddit Sans"/>
+                <a:cs typeface="Calibri"/>
+              </a:rPr>
+              <a:t> no </a:t>
+            </a:r>
+            <a:r>
+              <a:rPr lang="en-US" sz="1100" dirty="0" err="1">
+                <a:solidFill>
+                  <a:srgbClr val="AABBDD"/>
+                </a:solidFill>
+                <a:latin typeface="Reddit Sans"/>
+                <a:ea typeface="Reddit Sans"/>
+                <a:cs typeface="Calibri"/>
+              </a:rPr>
+              <a:t>compite</a:t>
+            </a:r>
+            <a:r>
+              <a:rPr lang="en-US" sz="1100" dirty="0">
+                <a:solidFill>
+                  <a:srgbClr val="AABBDD"/>
+                </a:solidFill>
+                <a:latin typeface="Reddit Sans"/>
+                <a:ea typeface="Reddit Sans"/>
+                <a:cs typeface="Calibri"/>
+              </a:rPr>
+              <a:t> </a:t>
+            </a:r>
+            <a:r>
+              <a:rPr lang="en-US" sz="1100" dirty="0" err="1">
+                <a:solidFill>
+                  <a:srgbClr val="AABBDD"/>
+                </a:solidFill>
+                <a:latin typeface="Reddit Sans"/>
+                <a:ea typeface="Reddit Sans"/>
+                <a:cs typeface="Calibri"/>
+              </a:rPr>
+              <a:t>por</a:t>
+            </a:r>
+            <a:r>
+              <a:rPr lang="en-US" sz="1100" dirty="0">
+                <a:solidFill>
+                  <a:srgbClr val="AABBDD"/>
+                </a:solidFill>
+                <a:latin typeface="Reddit Sans"/>
+                <a:ea typeface="Reddit Sans"/>
+                <a:cs typeface="Calibri"/>
+              </a:rPr>
+              <a:t> </a:t>
+            </a:r>
+            <a:r>
+              <a:rPr lang="en-US" sz="1100" dirty="0" err="1">
+                <a:solidFill>
+                  <a:srgbClr val="AABBDD"/>
+                </a:solidFill>
+                <a:latin typeface="Reddit Sans"/>
+                <a:ea typeface="Reddit Sans"/>
+                <a:cs typeface="Calibri"/>
+              </a:rPr>
+              <a:t>plataforma</a:t>
+            </a:r>
+            <a:r>
+              <a:rPr lang="en-US" sz="1100" dirty="0">
+                <a:solidFill>
+                  <a:srgbClr val="AABBDD"/>
+                </a:solidFill>
+                <a:latin typeface="Reddit Sans"/>
+                <a:ea typeface="Reddit Sans"/>
+                <a:cs typeface="Calibri"/>
+              </a:rPr>
+              <a:t>, </a:t>
+            </a:r>
+            <a:r>
+              <a:rPr lang="en-US" sz="1100" dirty="0" err="1">
+                <a:solidFill>
+                  <a:srgbClr val="AABBDD"/>
+                </a:solidFill>
+                <a:latin typeface="Reddit Sans"/>
+                <a:ea typeface="Reddit Sans"/>
+                <a:cs typeface="Calibri"/>
+              </a:rPr>
+              <a:t>compite</a:t>
+            </a:r>
+            <a:r>
+              <a:rPr lang="en-US" sz="1100" dirty="0">
+                <a:solidFill>
+                  <a:srgbClr val="AABBDD"/>
+                </a:solidFill>
+                <a:latin typeface="Reddit Sans"/>
+                <a:ea typeface="Reddit Sans"/>
+                <a:cs typeface="Calibri"/>
+              </a:rPr>
+              <a:t> </a:t>
+            </a:r>
+            <a:r>
+              <a:rPr lang="en-US" sz="1100" dirty="0" err="1">
+                <a:solidFill>
+                  <a:srgbClr val="AABBDD"/>
+                </a:solidFill>
+                <a:latin typeface="Reddit Sans"/>
+                <a:ea typeface="Reddit Sans"/>
+                <a:cs typeface="Calibri"/>
+              </a:rPr>
+              <a:t>por</a:t>
+            </a:r>
+            <a:r>
+              <a:rPr lang="en-US" sz="1100" dirty="0">
+                <a:solidFill>
+                  <a:srgbClr val="AABBDD"/>
+                </a:solidFill>
+                <a:latin typeface="Reddit Sans"/>
+                <a:ea typeface="Reddit Sans"/>
+                <a:cs typeface="Calibri"/>
+              </a:rPr>
+              <a:t> </a:t>
+            </a:r>
+            <a:r>
+              <a:rPr lang="en-US" sz="1100" dirty="0" err="1">
+                <a:solidFill>
+                  <a:srgbClr val="AABBDD"/>
+                </a:solidFill>
+                <a:latin typeface="Reddit Sans"/>
+                <a:ea typeface="Reddit Sans"/>
+                <a:cs typeface="Calibri"/>
+              </a:rPr>
+              <a:t>inteligencia</a:t>
+            </a:r>
+            <a:endParaRPr lang="en-US" sz="1100" dirty="0" err="1">
+              <a:latin typeface="Reddit Sans"/>
+              <a:ea typeface="Reddit Sans"/>
+              <a:cs typeface="Calibri"/>
+            </a:endParaRPr>
+          </a:p>
+        </p:txBody>
+      </p:sp>
+      <p:sp>
+        <p:nvSpPr>
+          <p:cNvPr id="22" name="Panel 9 Capacidades"/>
+          <p:cNvSpPr/>
+          <p:nvPr/>
+        </p:nvSpPr>
+        <p:spPr>
+          <a:xfrm>
+            <a:off x="436512" y="2970000"/>
+            <a:ext cx="8453628" cy="1150000"/>
+          </a:xfrm>
+          <a:prstGeom prst="roundRect">
+            <a:avLst>
+              <a:gd name="adj" fmla="val 3200"/>
+            </a:avLst>
+          </a:prstGeom>
+          <a:solidFill>
+            <a:srgbClr val="EAF7F0"/>
+          </a:solidFill>
+          <a:ln w="12700">
+            <a:solidFill>
+              <a:srgbClr val="1E7B4B"/>
+            </a:solidFill>
+            <a:prstDash val="solid"/>
+          </a:ln>
+        </p:spPr>
+      </p:sp>
+      <p:sp>
+        <p:nvSpPr>
+          <p:cNvPr id="23" name="Titulo Panel"/>
+          <p:cNvSpPr/>
+          <p:nvPr/>
+        </p:nvSpPr>
+        <p:spPr>
+          <a:xfrm>
+            <a:off x="636512" y="3000000"/>
+            <a:ext cx="8053628" cy="230000"/>
+          </a:xfrm>
+          <a:prstGeom prst="rect">
+            <a:avLst/>
+          </a:prstGeom>
+          <a:noFill/>
+          <a:ln/>
+        </p:spPr>
+        <p:txBody>
           <a:bodyPr wrap="square" rtlCol="0" anchor="ctr"/>
           <a:lstStyle/>
           <a:p>
-            <a:pPr marL="0" indent="0" algn="l">
+            <a:pPr marL="0" indent="0" algn="ctr">
               <a:buNone/>
             </a:pPr>
             <a:r>
-              <a:rPr lang="en-US" sz="1100" dirty="0">
-                <a:solidFill>
-                  <a:srgbClr val="AABBDD"/>
-                </a:solidFill>
-                <a:latin typeface="Reddit Sans" panose="020B0604020202020204" charset="0"/>
-                <a:ea typeface="Reddit Sans" panose="020B0604020202020204" charset="0"/>
-                <a:cs typeface="Calibri" pitchFamily="34" charset="-120"/>
-              </a:rPr>
-              <a:t>El mercado ya no compite por plataforma — compite por inteligencia</a:t>
-            </a:r>
-            <a:endParaRPr lang="en-US" sz="1100" dirty="0">
-              <a:latin typeface="Reddit Sans" panose="020B0604020202020204" charset="0"/>
-              <a:ea typeface="Reddit Sans" panose="020B0604020202020204" charset="0"/>
-            </a:endParaRPr>
+              <a:rPr lang="es-CO" sz="1000" b="1">
+                <a:solidFill>
+                  <a:srgbClr val="1E7B4B"/>
+                </a:solidFill>
+                <a:latin typeface="Reddit Sans"/>
+                <a:ea typeface="Reddit Sans"/>
+                <a:cs typeface="Calibri"/>
+              </a:rPr>
+              <a:t>Las 9 capacidades críticas de IA que evalúa Gartner</a:t>
+            </a:r>
+            <a:r>
+              <a:rPr lang="es-CO" sz="1000">
+                <a:solidFill>
+                  <a:srgbClr val="5A6B7B"/>
+                </a:solidFill>
+                <a:latin typeface="Reddit Sans"/>
+                <a:ea typeface="Reddit Sans"/>
+                <a:cs typeface="Calibri"/>
+              </a:rPr>
+              <a:t>  ·  un producto debe cumplir mínimo 5 para calificar</a:t>
+            </a:r>
+          </a:p>
+        </p:txBody>
+      </p:sp>
+      <p:sp>
+        <p:nvSpPr>
+          <p:cNvPr id="24" name="Chip 1"/>
+          <p:cNvSpPr/>
+          <p:nvPr/>
+        </p:nvSpPr>
+        <p:spPr>
+          <a:xfrm>
+            <a:off x="636512" y="3250000"/>
+            <a:ext cx="2584542" cy="260000"/>
+          </a:xfrm>
+          <a:prstGeom prst="roundRect">
+            <a:avLst>
+              <a:gd name="adj" fmla="val 12000"/>
+            </a:avLst>
+          </a:prstGeom>
+          <a:solidFill>
+            <a:srgbClr val="FFFFFF"/>
+          </a:solidFill>
+          <a:ln w="9525">
+            <a:solidFill>
+              <a:srgbClr val="1E7B4B"/>
+            </a:solidFill>
+          </a:ln>
+        </p:spPr>
+        <p:txBody>
+          <a:bodyPr wrap="square" lIns="300000" tIns="18000" rIns="36000" bIns="18000" rtlCol="0" anchor="ctr"/>
+          <a:lstStyle/>
+          <a:p>
+            <a:pPr marL="0" indent="0">
+              <a:buNone/>
+            </a:pPr>
+            <a:r>
+              <a:rPr lang="es-CO" sz="900" b="1">
+                <a:solidFill>
+                  <a:srgbClr val="1E7B4B"/>
+                </a:solidFill>
+                <a:latin typeface="Reddit Sans"/>
+                <a:ea typeface="Reddit Sans"/>
+                <a:cs typeface="Calibri"/>
+              </a:rPr>
+              <a:t>1  </a:t>
+            </a:r>
+            <a:r>
+              <a:rPr lang="es-CO" sz="900">
+                <a:solidFill>
+                  <a:srgbClr val="1A1A2E"/>
+                </a:solidFill>
+                <a:latin typeface="Reddit Sans"/>
+                <a:ea typeface="Reddit Sans"/>
+                <a:cs typeface="Calibri"/>
+              </a:rPr>
+              <a:t>Agente virtual de soporte</a:t>
+            </a:r>
+          </a:p>
+        </p:txBody>
+      </p:sp>
+      <p:sp>
+        <p:nvSpPr>
+          <p:cNvPr id="25" name="Chip 2"/>
+          <p:cNvSpPr/>
+          <p:nvPr/>
+        </p:nvSpPr>
+        <p:spPr>
+          <a:xfrm>
+            <a:off x="3371054" y="3250000"/>
+            <a:ext cx="2584542" cy="260000"/>
+          </a:xfrm>
+          <a:prstGeom prst="roundRect">
+            <a:avLst>
+              <a:gd name="adj" fmla="val 12000"/>
+            </a:avLst>
+          </a:prstGeom>
+          <a:solidFill>
+            <a:srgbClr val="FFFFFF"/>
+          </a:solidFill>
+          <a:ln w="9525">
+            <a:solidFill>
+              <a:srgbClr val="1E7B4B"/>
+            </a:solidFill>
+          </a:ln>
+        </p:spPr>
+        <p:txBody>
+          <a:bodyPr wrap="square" lIns="300000" tIns="18000" rIns="36000" bIns="18000" rtlCol="0" anchor="ctr"/>
+          <a:lstStyle/>
+          <a:p>
+            <a:pPr marL="0" indent="0">
+              <a:buNone/>
+            </a:pPr>
+            <a:r>
+              <a:rPr lang="es-CO" sz="900" b="1">
+                <a:solidFill>
+                  <a:srgbClr val="1E7B4B"/>
+                </a:solidFill>
+                <a:latin typeface="Reddit Sans"/>
+                <a:ea typeface="Reddit Sans"/>
+                <a:cs typeface="Calibri"/>
+              </a:rPr>
+              <a:t>2  </a:t>
+            </a:r>
+            <a:r>
+              <a:rPr lang="es-CO" sz="900">
+                <a:solidFill>
+                  <a:srgbClr val="1A1A2E"/>
+                </a:solidFill>
+                <a:latin typeface="Reddit Sans"/>
+                <a:ea typeface="Reddit Sans"/>
+                <a:cs typeface="Calibri"/>
+              </a:rPr>
+              <a:t>Descubrimiento de conocimiento</a:t>
+            </a:r>
+          </a:p>
+        </p:txBody>
+      </p:sp>
+      <p:sp>
+        <p:nvSpPr>
+          <p:cNvPr id="26" name="Chip 3"/>
+          <p:cNvSpPr/>
+          <p:nvPr/>
+        </p:nvSpPr>
+        <p:spPr>
+          <a:xfrm>
+            <a:off x="6105596" y="3250000"/>
+            <a:ext cx="2584542" cy="260000"/>
+          </a:xfrm>
+          <a:prstGeom prst="roundRect">
+            <a:avLst>
+              <a:gd name="adj" fmla="val 12000"/>
+            </a:avLst>
+          </a:prstGeom>
+          <a:solidFill>
+            <a:srgbClr val="FFFFFF"/>
+          </a:solidFill>
+          <a:ln w="9525">
+            <a:solidFill>
+              <a:srgbClr val="1E7B4B"/>
+            </a:solidFill>
+          </a:ln>
+        </p:spPr>
+        <p:txBody>
+          <a:bodyPr wrap="square" lIns="300000" tIns="18000" rIns="36000" bIns="18000" rtlCol="0" anchor="ctr"/>
+          <a:lstStyle/>
+          <a:p>
+            <a:pPr marL="0" indent="0">
+              <a:buNone/>
+            </a:pPr>
+            <a:r>
+              <a:rPr lang="es-CO" sz="900" b="1">
+                <a:solidFill>
+                  <a:srgbClr val="1E7B4B"/>
+                </a:solidFill>
+                <a:latin typeface="Reddit Sans"/>
+                <a:ea typeface="Reddit Sans"/>
+                <a:cs typeface="Calibri"/>
+              </a:rPr>
+              <a:t>3  </a:t>
+            </a:r>
+            <a:r>
+              <a:rPr lang="es-CO" sz="900">
+                <a:solidFill>
+                  <a:srgbClr val="1A1A2E"/>
+                </a:solidFill>
+                <a:latin typeface="Reddit Sans"/>
+                <a:ea typeface="Reddit Sans"/>
+                <a:cs typeface="Calibri"/>
+              </a:rPr>
+              <a:t>Escalamiento inteligente</a:t>
+            </a:r>
+          </a:p>
+        </p:txBody>
+      </p:sp>
+      <p:sp>
+        <p:nvSpPr>
+          <p:cNvPr id="27" name="Chip 4"/>
+          <p:cNvSpPr/>
+          <p:nvPr/>
+        </p:nvSpPr>
+        <p:spPr>
+          <a:xfrm>
+            <a:off x="636512" y="3540000"/>
+            <a:ext cx="2584542" cy="260000"/>
+          </a:xfrm>
+          <a:prstGeom prst="roundRect">
+            <a:avLst>
+              <a:gd name="adj" fmla="val 12000"/>
+            </a:avLst>
+          </a:prstGeom>
+          <a:solidFill>
+            <a:srgbClr val="FFFFFF"/>
+          </a:solidFill>
+          <a:ln w="9525">
+            <a:solidFill>
+              <a:srgbClr val="1E7B4B"/>
+            </a:solidFill>
+          </a:ln>
+        </p:spPr>
+        <p:txBody>
+          <a:bodyPr wrap="square" lIns="300000" tIns="18000" rIns="36000" bIns="18000" rtlCol="0" anchor="ctr"/>
+          <a:lstStyle/>
+          <a:p>
+            <a:pPr marL="0" indent="0">
+              <a:buNone/>
+            </a:pPr>
+            <a:r>
+              <a:rPr lang="es-CO" sz="900" b="1">
+                <a:solidFill>
+                  <a:srgbClr val="1E7B4B"/>
+                </a:solidFill>
+                <a:latin typeface="Reddit Sans"/>
+                <a:ea typeface="Reddit Sans"/>
+                <a:cs typeface="Calibri"/>
+              </a:rPr>
+              <a:t>4  </a:t>
+            </a:r>
+            <a:r>
+              <a:rPr lang="es-CO" sz="900">
+                <a:solidFill>
+                  <a:srgbClr val="1A1A2E"/>
+                </a:solidFill>
+                <a:latin typeface="Reddit Sans"/>
+                <a:ea typeface="Reddit Sans"/>
+                <a:cs typeface="Calibri"/>
+              </a:rPr>
+              <a:t>Asesoría inteligente de riesgo</a:t>
+            </a:r>
+          </a:p>
+        </p:txBody>
+      </p:sp>
+      <p:sp>
+        <p:nvSpPr>
+          <p:cNvPr id="28" name="Chip 5"/>
+          <p:cNvSpPr/>
+          <p:nvPr/>
+        </p:nvSpPr>
+        <p:spPr>
+          <a:xfrm>
+            <a:off x="3371054" y="3540000"/>
+            <a:ext cx="2584542" cy="260000"/>
+          </a:xfrm>
+          <a:prstGeom prst="roundRect">
+            <a:avLst>
+              <a:gd name="adj" fmla="val 12000"/>
+            </a:avLst>
+          </a:prstGeom>
+          <a:solidFill>
+            <a:srgbClr val="FFFFFF"/>
+          </a:solidFill>
+          <a:ln w="9525">
+            <a:solidFill>
+              <a:srgbClr val="1E7B4B"/>
+            </a:solidFill>
+          </a:ln>
+        </p:spPr>
+        <p:txBody>
+          <a:bodyPr wrap="square" lIns="300000" tIns="18000" rIns="36000" bIns="18000" rtlCol="0" anchor="ctr"/>
+          <a:lstStyle/>
+          <a:p>
+            <a:pPr marL="0" indent="0">
+              <a:buNone/>
+            </a:pPr>
+            <a:r>
+              <a:rPr lang="es-CO" sz="900" b="1">
+                <a:solidFill>
+                  <a:srgbClr val="1E7B4B"/>
+                </a:solidFill>
+                <a:latin typeface="Reddit Sans"/>
+                <a:ea typeface="Reddit Sans"/>
+                <a:cs typeface="Calibri"/>
+              </a:rPr>
+              <a:t>5  </a:t>
+            </a:r>
+            <a:r>
+              <a:rPr lang="es-CO" sz="900">
+                <a:solidFill>
+                  <a:srgbClr val="1A1A2E"/>
+                </a:solidFill>
+                <a:latin typeface="Reddit Sans"/>
+                <a:ea typeface="Reddit Sans"/>
+                <a:cs typeface="Calibri"/>
+              </a:rPr>
+              <a:t>Triage inteligente</a:t>
+            </a:r>
+          </a:p>
+        </p:txBody>
+      </p:sp>
+      <p:sp>
+        <p:nvSpPr>
+          <p:cNvPr id="29" name="Chip 6"/>
+          <p:cNvSpPr/>
+          <p:nvPr/>
+        </p:nvSpPr>
+        <p:spPr>
+          <a:xfrm>
+            <a:off x="6105596" y="3540000"/>
+            <a:ext cx="2584542" cy="260000"/>
+          </a:xfrm>
+          <a:prstGeom prst="roundRect">
+            <a:avLst>
+              <a:gd name="adj" fmla="val 12000"/>
+            </a:avLst>
+          </a:prstGeom>
+          <a:solidFill>
+            <a:srgbClr val="FFFFFF"/>
+          </a:solidFill>
+          <a:ln w="9525">
+            <a:solidFill>
+              <a:srgbClr val="1E7B4B"/>
+            </a:solidFill>
+          </a:ln>
+        </p:spPr>
+        <p:txBody>
+          <a:bodyPr wrap="square" lIns="300000" tIns="18000" rIns="36000" bIns="18000" rtlCol="0" anchor="ctr"/>
+          <a:lstStyle/>
+          <a:p>
+            <a:pPr marL="0" indent="0">
+              <a:buNone/>
+            </a:pPr>
+            <a:r>
+              <a:rPr lang="es-CO" sz="900" b="1">
+                <a:solidFill>
+                  <a:srgbClr val="1E7B4B"/>
+                </a:solidFill>
+                <a:latin typeface="Reddit Sans"/>
+                <a:ea typeface="Reddit Sans"/>
+                <a:cs typeface="Calibri"/>
+              </a:rPr>
+              <a:t>6  </a:t>
+            </a:r>
+            <a:r>
+              <a:rPr lang="es-CO" sz="900">
+                <a:solidFill>
+                  <a:srgbClr val="1A1A2E"/>
+                </a:solidFill>
+                <a:latin typeface="Reddit Sans"/>
+                <a:ea typeface="Reddit Sans"/>
+                <a:cs typeface="Calibri"/>
+              </a:rPr>
+              <a:t>Categorización inteligente</a:t>
+            </a:r>
+          </a:p>
+        </p:txBody>
+      </p:sp>
+      <p:sp>
+        <p:nvSpPr>
+          <p:cNvPr id="30" name="Chip 7"/>
+          <p:cNvSpPr/>
+          <p:nvPr/>
+        </p:nvSpPr>
+        <p:spPr>
+          <a:xfrm>
+            <a:off x="636512" y="3830000"/>
+            <a:ext cx="2584542" cy="260000"/>
+          </a:xfrm>
+          <a:prstGeom prst="roundRect">
+            <a:avLst>
+              <a:gd name="adj" fmla="val 12000"/>
+            </a:avLst>
+          </a:prstGeom>
+          <a:solidFill>
+            <a:srgbClr val="FFFFFF"/>
+          </a:solidFill>
+          <a:ln w="9525">
+            <a:solidFill>
+              <a:srgbClr val="1E7B4B"/>
+            </a:solidFill>
+          </a:ln>
+        </p:spPr>
+        <p:txBody>
+          <a:bodyPr wrap="square" lIns="300000" tIns="18000" rIns="36000" bIns="18000" rtlCol="0" anchor="ctr"/>
+          <a:lstStyle/>
+          <a:p>
+            <a:pPr marL="0" indent="0">
+              <a:buNone/>
+            </a:pPr>
+            <a:r>
+              <a:rPr lang="es-CO" sz="900" b="1">
+                <a:solidFill>
+                  <a:srgbClr val="1E7B4B"/>
+                </a:solidFill>
+                <a:latin typeface="Reddit Sans"/>
+                <a:ea typeface="Reddit Sans"/>
+                <a:cs typeface="Calibri"/>
+              </a:rPr>
+              <a:t>7  </a:t>
+            </a:r>
+            <a:r>
+              <a:rPr lang="es-CO" sz="900">
+                <a:solidFill>
+                  <a:srgbClr val="1A1A2E"/>
+                </a:solidFill>
+                <a:latin typeface="Reddit Sans"/>
+                <a:ea typeface="Reddit Sans"/>
+                <a:cs typeface="Calibri"/>
+              </a:rPr>
+              <a:t>Swarming de expertos</a:t>
+            </a:r>
+          </a:p>
+        </p:txBody>
+      </p:sp>
+      <p:sp>
+        <p:nvSpPr>
+          <p:cNvPr id="31" name="Chip 8"/>
+          <p:cNvSpPr/>
+          <p:nvPr/>
+        </p:nvSpPr>
+        <p:spPr>
+          <a:xfrm>
+            <a:off x="3371054" y="3830000"/>
+            <a:ext cx="2584542" cy="260000"/>
+          </a:xfrm>
+          <a:prstGeom prst="roundRect">
+            <a:avLst>
+              <a:gd name="adj" fmla="val 12000"/>
+            </a:avLst>
+          </a:prstGeom>
+          <a:solidFill>
+            <a:srgbClr val="FFFFFF"/>
+          </a:solidFill>
+          <a:ln w="9525">
+            <a:solidFill>
+              <a:srgbClr val="1E7B4B"/>
+            </a:solidFill>
+          </a:ln>
+        </p:spPr>
+        <p:txBody>
+          <a:bodyPr wrap="square" lIns="300000" tIns="18000" rIns="36000" bIns="18000" rtlCol="0" anchor="ctr"/>
+          <a:lstStyle/>
+          <a:p>
+            <a:pPr marL="0" indent="0">
+              <a:buNone/>
+            </a:pPr>
+            <a:r>
+              <a:rPr lang="es-CO" sz="900" b="1">
+                <a:solidFill>
+                  <a:srgbClr val="1E7B4B"/>
+                </a:solidFill>
+                <a:latin typeface="Reddit Sans"/>
+                <a:ea typeface="Reddit Sans"/>
+                <a:cs typeface="Calibri"/>
+              </a:rPr>
+              <a:t>8  </a:t>
+            </a:r>
+            <a:r>
+              <a:rPr lang="es-CO" sz="900">
+                <a:solidFill>
+                  <a:srgbClr val="1A1A2E"/>
+                </a:solidFill>
+                <a:latin typeface="Reddit Sans"/>
+                <a:ea typeface="Reddit Sans"/>
+                <a:cs typeface="Calibri"/>
+              </a:rPr>
+              <a:t>Detección de incidentes mayores</a:t>
+            </a:r>
+          </a:p>
+        </p:txBody>
+      </p:sp>
+      <p:sp>
+        <p:nvSpPr>
+          <p:cNvPr id="32" name="Chip 9"/>
+          <p:cNvSpPr/>
+          <p:nvPr/>
+        </p:nvSpPr>
+        <p:spPr>
+          <a:xfrm>
+            <a:off x="6105596" y="3830000"/>
+            <a:ext cx="2584542" cy="260000"/>
+          </a:xfrm>
+          <a:prstGeom prst="roundRect">
+            <a:avLst>
+              <a:gd name="adj" fmla="val 12000"/>
+            </a:avLst>
+          </a:prstGeom>
+          <a:solidFill>
+            <a:srgbClr val="FFFFFF"/>
+          </a:solidFill>
+          <a:ln w="9525">
+            <a:solidFill>
+              <a:srgbClr val="1E7B4B"/>
+            </a:solidFill>
+          </a:ln>
+        </p:spPr>
+        <p:txBody>
+          <a:bodyPr wrap="square" lIns="300000" tIns="18000" rIns="36000" bIns="18000" rtlCol="0" anchor="ctr"/>
+          <a:lstStyle/>
+          <a:p>
+            <a:pPr marL="0" indent="0">
+              <a:buNone/>
+            </a:pPr>
+            <a:r>
+              <a:rPr lang="es-CO" sz="900" b="1">
+                <a:solidFill>
+                  <a:srgbClr val="1E7B4B"/>
+                </a:solidFill>
+                <a:latin typeface="Reddit Sans"/>
+                <a:ea typeface="Reddit Sans"/>
+                <a:cs typeface="Calibri"/>
+              </a:rPr>
+              <a:t>9  </a:t>
+            </a:r>
+            <a:r>
+              <a:rPr lang="es-CO" sz="900">
+                <a:solidFill>
+                  <a:srgbClr val="1A1A2E"/>
+                </a:solidFill>
+                <a:latin typeface="Reddit Sans"/>
+                <a:ea typeface="Reddit Sans"/>
+                <a:cs typeface="Calibri"/>
+              </a:rPr>
+              <a:t>Detección de problemas (causa raíz)</a:t>
+            </a:r>
           </a:p>
         </p:txBody>
       </p:sp>
